--- a/GMP合规管理/工厂GMP合规管理.pptx
+++ b/GMP合规管理/工厂GMP合规管理.pptx
@@ -6637,8 +6637,8 @@
         </p:nvSpPr>
         <p:spPr>
           <a:xfrm>
-            <a:off x="11704349" y="219456"/>
-            <a:ext cx="11521468" cy="1554483"/>
+            <a:off x="11338588" y="146304"/>
+            <a:ext cx="11887229" cy="1316739"/>
           </a:xfrm>
           <a:prstGeom prst="rect">
             <a:avLst/>
@@ -6657,7 +6657,7 @@
               </a:lnSpc>
             </a:pPr>
             <a:r>
-              <a:rPr sz="4800" b="1" i="0">
+              <a:rPr sz="5000" b="1" i="0">
                 <a:solidFill>
                   <a:srgbClr val="132556"/>
                 </a:solidFill>
@@ -6678,26 +6678,26 @@
         </p:nvSpPr>
         <p:spPr>
           <a:xfrm>
-            <a:off x="1261875" y="2084837"/>
-            <a:ext cx="21872502" cy="10899675"/>
+            <a:off x="914402" y="1645924"/>
+            <a:ext cx="11164851" cy="6661237"/>
           </a:xfrm>
           <a:prstGeom prst="roundRect">
             <a:avLst>
-              <a:gd name="adj" fmla="val 3500"/>
+              <a:gd name="adj" fmla="val 4000"/>
             </a:avLst>
           </a:prstGeom>
           <a:solidFill>
-            <a:srgbClr val="FFFFFF"/>
+            <a:srgbClr val="F7F9FD"/>
           </a:solidFill>
-          <a:ln w="38100">
+          <a:ln w="25400">
             <a:solidFill>
-              <a:srgbClr val="1D42E1"/>
+              <a:srgbClr val="C5D0E6"/>
             </a:solidFill>
           </a:ln>
           <a:effectLst>
-            <a:outerShdw blurRad="101600" dist="50800" dir="5400000" rotWithShape="0">
+            <a:outerShdw blurRad="76200" dist="38100" dir="5400000" rotWithShape="0">
               <a:srgbClr val="000000">
-                <a:alpha val="25000"/>
+                <a:alpha val="18000"/>
               </a:srgbClr>
             </a:outerShdw>
           </a:effectLst>
@@ -6726,14 +6726,58 @@
       </p:sp>
       <p:sp>
         <p:nvSpPr>
-          <p:cNvPr id="4" name="TextBox 3"/>
+          <p:cNvPr id="4" name="Rectangle 3"/>
+          <p:cNvSpPr/>
+          <p:nvPr/>
+        </p:nvSpPr>
+        <p:spPr>
+          <a:xfrm>
+            <a:off x="914402" y="1645924"/>
+            <a:ext cx="109728" cy="6661237"/>
+          </a:xfrm>
+          <a:prstGeom prst="rect">
+            <a:avLst/>
+          </a:prstGeom>
+          <a:solidFill>
+            <a:srgbClr val="1D42E1"/>
+          </a:solidFill>
+          <a:ln>
+            <a:noFill/>
+          </a:ln>
+          <a:effectLst/>
+        </p:spPr>
+        <p:style>
+          <a:lnRef idx="1">
+            <a:schemeClr val="accent1"/>
+          </a:lnRef>
+          <a:fillRef idx="3">
+            <a:schemeClr val="accent1"/>
+          </a:fillRef>
+          <a:effectRef idx="2">
+            <a:schemeClr val="accent1"/>
+          </a:effectRef>
+          <a:fontRef idx="minor">
+            <a:schemeClr val="lt1"/>
+          </a:fontRef>
+        </p:style>
+        <p:txBody>
+          <a:bodyPr rtlCol="0" anchor="ctr" wrap="square"/>
+          <a:lstStyle/>
+          <a:p>
+            <a:pPr algn="ctr"/>
+          </a:p>
+        </p:txBody>
+      </p:sp>
+      <p:sp>
+        <p:nvSpPr>
+          <p:cNvPr id="5" name="TextBox 4"/>
           <p:cNvSpPr txBox="1"/>
           <p:nvPr/>
         </p:nvSpPr>
         <p:spPr>
           <a:xfrm>
-            <a:off x="1627636" y="2340869"/>
-            <a:ext cx="1426467" cy="1060706"/>
+            <a:off x="1207011" y="1682500"/>
+            <a:ext cx="1499619" cy="804674"/>
           </a:xfrm>
           <a:prstGeom prst="rect">
             <a:avLst/>
@@ -6767,14 +6811,14 @@
       </p:sp>
       <p:sp>
         <p:nvSpPr>
-          <p:cNvPr id="5" name="TextBox 4"/>
+          <p:cNvPr id="6" name="TextBox 5"/>
           <p:cNvSpPr txBox="1"/>
           <p:nvPr/>
         </p:nvSpPr>
         <p:spPr>
           <a:xfrm>
-            <a:off x="3054103" y="2523750"/>
-            <a:ext cx="3538736" cy="841250"/>
+            <a:off x="2651766" y="1755652"/>
+            <a:ext cx="9061726" cy="658369"/>
           </a:xfrm>
           <a:prstGeom prst="rect">
             <a:avLst/>
@@ -6789,11 +6833,11 @@
           <a:p>
             <a:pPr algn="l">
               <a:lnSpc>
-                <a:spcPct val="112000"/>
+                <a:spcPct val="108000"/>
               </a:lnSpc>
             </a:pPr>
             <a:r>
-              <a:rPr sz="1760" b="1" i="0">
+              <a:rPr sz="2400" b="1" i="0">
                 <a:solidFill>
                   <a:srgbClr val="132556"/>
                 </a:solidFill>
@@ -6808,496 +6852,14 @@
       </p:sp>
       <p:cxnSp>
         <p:nvCxnSpPr>
-          <p:cNvPr id="6" name="Connector 5"/>
+          <p:cNvPr id="7" name="Connector 6"/>
           <p:cNvCxnSpPr/>
           <p:nvPr/>
         </p:nvCxnSpPr>
         <p:spPr>
           <a:xfrm>
-            <a:off x="1773940" y="3438152"/>
-            <a:ext cx="0" cy="9107447"/>
-          </a:xfrm>
-          <a:prstGeom prst="line">
-            <a:avLst/>
-          </a:prstGeom>
-          <a:ln w="34290">
-            <a:solidFill>
-              <a:srgbClr val="1D42E1"/>
-            </a:solidFill>
-          </a:ln>
-        </p:spPr>
-        <p:style>
-          <a:lnRef idx="2">
-            <a:schemeClr val="accent1"/>
-          </a:lnRef>
-          <a:fillRef idx="0">
-            <a:schemeClr val="accent1"/>
-          </a:fillRef>
-          <a:effectRef idx="1">
-            <a:schemeClr val="accent1"/>
-          </a:effectRef>
-          <a:fontRef idx="minor">
-            <a:schemeClr val="tx1"/>
-          </a:fontRef>
-        </p:style>
-      </p:cxnSp>
-      <p:sp>
-        <p:nvSpPr>
-          <p:cNvPr id="7" name="TextBox 6"/>
-          <p:cNvSpPr txBox="1"/>
-          <p:nvPr/>
-        </p:nvSpPr>
-        <p:spPr>
-          <a:xfrm>
-            <a:off x="2029973" y="3511304"/>
-            <a:ext cx="4526291" cy="8997718"/>
-          </a:xfrm>
-          <a:prstGeom prst="rect">
-            <a:avLst/>
-          </a:prstGeom>
-          <a:noFill/>
-        </p:spPr>
-        <p:txBody>
-          <a:bodyPr wrap="square" lIns="0" rIns="0" tIns="0" bIns="0" anchor="t">
-            <a:spAutoFit/>
-          </a:bodyPr>
-          <a:lstStyle/>
-          <a:p>
-            <a:pPr algn="l">
-              <a:lnSpc>
-                <a:spcPct val="115000"/>
-              </a:lnSpc>
-            </a:pPr>
-            <a:r>
-              <a:rPr sz="1220" b="0">
-                <a:solidFill>
-                  <a:srgbClr val="1A1A1A"/>
-                </a:solidFill>
-                <a:latin typeface="Arial"/>
-                <a:ea typeface="微软雅黑"/>
-                <a:cs typeface="Arial"/>
-              </a:rPr>
-              <a:t>一、人员管理类高频合规性问题：着装，培训，外来人员管理，复核，隐瞒不报</a:t>
-            </a:r>
-          </a:p>
-          <a:p>
-            <a:pPr algn="l">
-              <a:lnSpc>
-                <a:spcPct val="115000"/>
-              </a:lnSpc>
-            </a:pPr>
-            <a:r>
-              <a:rPr sz="1220" b="0">
-                <a:solidFill>
-                  <a:srgbClr val="1A1A1A"/>
-                </a:solidFill>
-                <a:latin typeface="Arial"/>
-                <a:ea typeface="微软雅黑"/>
-                <a:cs typeface="Arial"/>
-              </a:rPr>
-              <a:t>二、物料、中间产品管理类（混淆、交叉污染）</a:t>
-            </a:r>
-          </a:p>
-          <a:p>
-            <a:pPr algn="l">
-              <a:lnSpc>
-                <a:spcPct val="115000"/>
-              </a:lnSpc>
-            </a:pPr>
-            <a:r>
-              <a:rPr sz="1220" b="0">
-                <a:solidFill>
-                  <a:srgbClr val="1A1A1A"/>
-                </a:solidFill>
-                <a:latin typeface="Arial"/>
-                <a:ea typeface="微软雅黑"/>
-                <a:cs typeface="Arial"/>
-              </a:rPr>
-              <a:t>三、工艺操作合规问题</a:t>
-            </a:r>
-          </a:p>
-          <a:p>
-            <a:pPr algn="l">
-              <a:lnSpc>
-                <a:spcPct val="115000"/>
-              </a:lnSpc>
-            </a:pPr>
-            <a:r>
-              <a:rPr sz="1220" b="0">
-                <a:solidFill>
-                  <a:srgbClr val="1A1A1A"/>
-                </a:solidFill>
-                <a:latin typeface="Arial"/>
-                <a:ea typeface="微软雅黑"/>
-                <a:cs typeface="Arial"/>
-              </a:rPr>
-              <a:t>四、设备、设施相关问题（衔接设备安全巡检）：状态，标识，清洁，跑冒滴漏，交叉污染；</a:t>
-            </a:r>
-          </a:p>
-          <a:p>
-            <a:pPr algn="l">
-              <a:lnSpc>
-                <a:spcPct val="115000"/>
-              </a:lnSpc>
-            </a:pPr>
-            <a:r>
-              <a:rPr sz="1220" b="0">
-                <a:solidFill>
-                  <a:srgbClr val="1A1A1A"/>
-                </a:solidFill>
-                <a:latin typeface="Arial"/>
-                <a:ea typeface="微软雅黑"/>
-                <a:cs typeface="Arial"/>
-              </a:rPr>
-              <a:t>五、洁净区环境与公用系统（无菌车间重灾区）</a:t>
-            </a:r>
-          </a:p>
-          <a:p>
-            <a:pPr algn="l">
-              <a:lnSpc>
-                <a:spcPct val="115000"/>
-              </a:lnSpc>
-            </a:pPr>
-            <a:r>
-              <a:rPr sz="1220" b="0">
-                <a:solidFill>
-                  <a:srgbClr val="1A1A1A"/>
-                </a:solidFill>
-                <a:latin typeface="Arial"/>
-                <a:ea typeface="微软雅黑"/>
-                <a:cs typeface="Arial"/>
-              </a:rPr>
-              <a:t>六、记录与文件缺陷（飞检第一关注重点）</a:t>
-            </a:r>
-          </a:p>
-          <a:p>
-            <a:pPr algn="l">
-              <a:lnSpc>
-                <a:spcPct val="115000"/>
-              </a:lnSpc>
-            </a:pPr>
-            <a:r>
-              <a:rPr sz="1220" b="0">
-                <a:solidFill>
-                  <a:srgbClr val="1A1A1A"/>
-                </a:solidFill>
-                <a:latin typeface="Arial"/>
-                <a:ea typeface="微软雅黑"/>
-                <a:cs typeface="Arial"/>
-              </a:rPr>
-              <a:t>七、计算机化系统 &amp; 数据完整性问题</a:t>
-            </a:r>
-          </a:p>
-          <a:p>
-            <a:pPr algn="l">
-              <a:lnSpc>
-                <a:spcPct val="115000"/>
-              </a:lnSpc>
-            </a:pPr>
-            <a:r>
-              <a:rPr sz="1220" b="0">
-                <a:solidFill>
-                  <a:srgbClr val="1A1A1A"/>
-                </a:solidFill>
-                <a:latin typeface="Arial"/>
-                <a:ea typeface="微软雅黑"/>
-                <a:cs typeface="Arial"/>
-              </a:rPr>
-              <a:t>八、质量体系工具落地问题（偏差、变更、CAPA、OOS瞒报，调查不充分）</a:t>
-            </a:r>
-          </a:p>
-          <a:p>
-            <a:pPr algn="l">
-              <a:lnSpc>
-                <a:spcPct val="115000"/>
-              </a:lnSpc>
-            </a:pPr>
-            <a:r>
-              <a:rPr sz="1220" b="0">
-                <a:solidFill>
-                  <a:srgbClr val="1A1A1A"/>
-                </a:solidFill>
-                <a:latin typeface="Arial"/>
-                <a:ea typeface="微软雅黑"/>
-                <a:cs typeface="Arial"/>
-              </a:rPr>
-              <a:t>九、现场 EHS 合规问题（GMP + 安全生产双重要求）</a:t>
-            </a:r>
-          </a:p>
-          <a:p>
-            <a:pPr algn="l">
-              <a:lnSpc>
-                <a:spcPct val="115000"/>
-              </a:lnSpc>
-              <a:spcBef>
-                <a:spcPts val="800"/>
-              </a:spcBef>
-            </a:pPr>
-            <a:r>
-              <a:rPr sz="1220" b="1">
-                <a:solidFill>
-                  <a:srgbClr val="FF0000"/>
-                </a:solidFill>
-                <a:latin typeface="Arial"/>
-                <a:ea typeface="微软雅黑"/>
-                <a:cs typeface="Arial"/>
-              </a:rPr>
-              <a:t>重大高风险缺陷（极易导致官方警告、停产）</a:t>
-            </a:r>
-          </a:p>
-          <a:p>
-            <a:pPr algn="l" marL="114300" indent="-114300">
-              <a:lnSpc>
-                <a:spcPct val="115000"/>
-              </a:lnSpc>
-              <a:buFont typeface="Arial"/>
-              <a:buChar char="●"/>
-            </a:pPr>
-            <a:r>
-              <a:rPr sz="1220" b="0">
-                <a:solidFill>
-                  <a:srgbClr val="1A1A1A"/>
-                </a:solidFill>
-                <a:latin typeface="Arial"/>
-                <a:ea typeface="微软雅黑"/>
-                <a:cs typeface="Arial"/>
-              </a:rPr>
-              <a:t>伪造、篡改生产 / 检验原始数据；共享账号规避系统管控</a:t>
-            </a:r>
-          </a:p>
-          <a:p>
-            <a:pPr algn="l" marL="114300" indent="-114300">
-              <a:lnSpc>
-                <a:spcPct val="115000"/>
-              </a:lnSpc>
-              <a:buFont typeface="Arial"/>
-              <a:buChar char="●"/>
-            </a:pPr>
-            <a:r>
-              <a:rPr sz="1220" b="0">
-                <a:solidFill>
-                  <a:srgbClr val="1A1A1A"/>
-                </a:solidFill>
-                <a:latin typeface="Arial"/>
-                <a:ea typeface="微软雅黑"/>
-                <a:cs typeface="Arial"/>
-              </a:rPr>
-              <a:t>未经 QA 放行物料投入生产</a:t>
-            </a:r>
-          </a:p>
-          <a:p>
-            <a:pPr algn="l" marL="114300" indent="-114300">
-              <a:lnSpc>
-                <a:spcPct val="115000"/>
-              </a:lnSpc>
-              <a:buFont typeface="Arial"/>
-              <a:buChar char="●"/>
-            </a:pPr>
-            <a:r>
-              <a:rPr sz="1220" b="0">
-                <a:solidFill>
-                  <a:srgbClr val="1A1A1A"/>
-                </a:solidFill>
-                <a:latin typeface="Arial"/>
-                <a:ea typeface="微软雅黑"/>
-                <a:cs typeface="Arial"/>
-              </a:rPr>
-              <a:t>隐瞒重大异常，不报偏差，继续生产产品</a:t>
-            </a:r>
-          </a:p>
-          <a:p>
-            <a:pPr algn="l" marL="114300" indent="-114300">
-              <a:lnSpc>
-                <a:spcPct val="115000"/>
-              </a:lnSpc>
-              <a:buFont typeface="Arial"/>
-              <a:buChar char="●"/>
-            </a:pPr>
-            <a:r>
-              <a:rPr sz="1220" b="0">
-                <a:solidFill>
-                  <a:srgbClr val="1A1A1A"/>
-                </a:solidFill>
-                <a:latin typeface="Arial"/>
-                <a:ea typeface="微软雅黑"/>
-                <a:cs typeface="Arial"/>
-              </a:rPr>
-              <a:t>拆除、屏蔽设备安全、工艺联锁装置</a:t>
-            </a:r>
-          </a:p>
-          <a:p>
-            <a:pPr algn="l" marL="114300" indent="-114300">
-              <a:lnSpc>
-                <a:spcPct val="115000"/>
-              </a:lnSpc>
-              <a:buFont typeface="Arial"/>
-              <a:buChar char="●"/>
-            </a:pPr>
-            <a:r>
-              <a:rPr sz="1220" b="0">
-                <a:solidFill>
-                  <a:srgbClr val="1A1A1A"/>
-                </a:solidFill>
-                <a:latin typeface="Arial"/>
-                <a:ea typeface="微软雅黑"/>
-                <a:cs typeface="Arial"/>
-              </a:rPr>
-              <a:t>跨品种生产未有效清场，存在严重交叉污染风险</a:t>
-            </a:r>
-          </a:p>
-          <a:p>
-            <a:pPr algn="l">
-              <a:lnSpc>
-                <a:spcPct val="115000"/>
-              </a:lnSpc>
-              <a:spcBef>
-                <a:spcPts val="600"/>
-              </a:spcBef>
-            </a:pPr>
-            <a:r>
-              <a:rPr sz="1220" b="1">
-                <a:solidFill>
-                  <a:srgbClr val="1A1A1A"/>
-                </a:solidFill>
-                <a:latin typeface="Arial"/>
-                <a:ea typeface="微软雅黑"/>
-                <a:cs typeface="Arial"/>
-              </a:rPr>
-              <a:t>主要一般缺陷（日常巡检最常见）</a:t>
-            </a:r>
-          </a:p>
-          <a:p>
-            <a:pPr algn="l" marL="114300" indent="-114300">
-              <a:lnSpc>
-                <a:spcPct val="115000"/>
-              </a:lnSpc>
-              <a:buFont typeface="Arial"/>
-              <a:buChar char="●"/>
-            </a:pPr>
-            <a:r>
-              <a:rPr sz="1220" b="0">
-                <a:solidFill>
-                  <a:srgbClr val="1A1A1A"/>
-                </a:solidFill>
-                <a:latin typeface="Arial"/>
-                <a:ea typeface="微软雅黑"/>
-                <a:cs typeface="Arial"/>
-              </a:rPr>
-              <a:t>记录填写不及时、信息不全；记录修改不规范</a:t>
-            </a:r>
-          </a:p>
-          <a:p>
-            <a:pPr algn="l" marL="114300" indent="-114300">
-              <a:lnSpc>
-                <a:spcPct val="115000"/>
-              </a:lnSpc>
-              <a:buFont typeface="Arial"/>
-              <a:buChar char="●"/>
-            </a:pPr>
-            <a:r>
-              <a:rPr sz="1220" b="0">
-                <a:solidFill>
-                  <a:srgbClr val="1A1A1A"/>
-                </a:solidFill>
-                <a:latin typeface="Arial"/>
-                <a:ea typeface="微软雅黑"/>
-                <a:cs typeface="Arial"/>
-              </a:rPr>
-              <a:t>物料标识不清、容器敞口存放</a:t>
-            </a:r>
-          </a:p>
-          <a:p>
-            <a:pPr algn="l" marL="114300" indent="-114300">
-              <a:lnSpc>
-                <a:spcPct val="115000"/>
-              </a:lnSpc>
-              <a:buFont typeface="Arial"/>
-              <a:buChar char="●"/>
-            </a:pPr>
-            <a:r>
-              <a:rPr sz="1220" b="0">
-                <a:solidFill>
-                  <a:srgbClr val="1A1A1A"/>
-                </a:solidFill>
-                <a:latin typeface="Arial"/>
-                <a:ea typeface="微软雅黑"/>
-                <a:cs typeface="Arial"/>
-              </a:rPr>
-              <a:t>洁净区人员行为违规、更衣不规范</a:t>
-            </a:r>
-          </a:p>
-          <a:p>
-            <a:pPr algn="l" marL="114300" indent="-114300">
-              <a:lnSpc>
-                <a:spcPct val="115000"/>
-              </a:lnSpc>
-              <a:buFont typeface="Arial"/>
-              <a:buChar char="●"/>
-            </a:pPr>
-            <a:r>
-              <a:rPr sz="1220" b="0">
-                <a:solidFill>
-                  <a:srgbClr val="1A1A1A"/>
-                </a:solidFill>
-                <a:latin typeface="Arial"/>
-                <a:ea typeface="微软雅黑"/>
-                <a:cs typeface="Arial"/>
-              </a:rPr>
-              <a:t>环境监测超标未调查；消毒管理不规范</a:t>
-            </a:r>
-          </a:p>
-          <a:p>
-            <a:pPr algn="l" marL="114300" indent="-114300">
-              <a:lnSpc>
-                <a:spcPct val="115000"/>
-              </a:lnSpc>
-              <a:buFont typeface="Arial"/>
-              <a:buChar char="●"/>
-            </a:pPr>
-            <a:r>
-              <a:rPr sz="1220" b="0">
-                <a:solidFill>
-                  <a:srgbClr val="1A1A1A"/>
-                </a:solidFill>
-                <a:latin typeface="Arial"/>
-                <a:ea typeface="微软雅黑"/>
-                <a:cs typeface="Arial"/>
-              </a:rPr>
-              <a:t>维保、巡检记录漏记；计量器具临近 / 超校准周期</a:t>
-            </a:r>
-          </a:p>
-          <a:p>
-            <a:pPr algn="l" marL="114300" indent="-114300">
-              <a:lnSpc>
-                <a:spcPct val="115000"/>
-              </a:lnSpc>
-              <a:buFont typeface="Arial"/>
-              <a:buChar char="●"/>
-            </a:pPr>
-            <a:r>
-              <a:rPr sz="1220" b="0">
-                <a:solidFill>
-                  <a:srgbClr val="1A1A1A"/>
-                </a:solidFill>
-                <a:latin typeface="Arial"/>
-                <a:ea typeface="微软雅黑"/>
-                <a:cs typeface="Arial"/>
-              </a:rPr>
-              <a:t>审计追踪仅开启，未实施周期性审核</a:t>
-            </a:r>
-          </a:p>
-        </p:txBody>
-      </p:sp>
-      <p:cxnSp>
-        <p:nvCxnSpPr>
-          <p:cNvPr id="8" name="Connector 7"/>
-          <p:cNvCxnSpPr/>
-          <p:nvPr/>
-        </p:nvCxnSpPr>
-        <p:spPr>
-          <a:xfrm>
-            <a:off x="6848873" y="2596902"/>
-            <a:ext cx="0" cy="9875545"/>
+            <a:off x="1207011" y="2523750"/>
+            <a:ext cx="10616210" cy="0"/>
           </a:xfrm>
           <a:prstGeom prst="line">
             <a:avLst/>
@@ -7325,14 +6887,14 @@
       </p:cxnSp>
       <p:sp>
         <p:nvSpPr>
-          <p:cNvPr id="9" name="TextBox 8"/>
+          <p:cNvPr id="8" name="TextBox 7"/>
           <p:cNvSpPr txBox="1"/>
           <p:nvPr/>
         </p:nvSpPr>
         <p:spPr>
           <a:xfrm>
-            <a:off x="6995177" y="2340869"/>
-            <a:ext cx="1426467" cy="1060706"/>
+            <a:off x="1280163" y="2633478"/>
+            <a:ext cx="10506482" cy="5527378"/>
           </a:xfrm>
           <a:prstGeom prst="rect">
             <a:avLst/>
@@ -7340,40 +6902,544 @@
           <a:noFill/>
         </p:spPr>
         <p:txBody>
-          <a:bodyPr wrap="square" lIns="0" rIns="0" tIns="0" bIns="0" anchor="ctr">
+          <a:bodyPr wrap="square" lIns="0" rIns="0" tIns="0" bIns="0" anchor="t">
             <a:spAutoFit/>
           </a:bodyPr>
           <a:lstStyle/>
           <a:p>
             <a:pPr algn="l">
               <a:lnSpc>
-                <a:spcPct val="128000"/>
+                <a:spcPct val="114000"/>
               </a:lnSpc>
             </a:pPr>
             <a:r>
-              <a:rPr sz="4800" b="1" i="0">
-                <a:solidFill>
-                  <a:srgbClr val="132556"/>
+              <a:rPr sz="1540" b="0">
+                <a:solidFill>
+                  <a:srgbClr val="1A1A1A"/>
                 </a:solidFill>
                 <a:latin typeface="Arial"/>
                 <a:ea typeface="微软雅黑"/>
                 <a:cs typeface="Arial"/>
               </a:rPr>
-              <a:t>02</a:t>
-            </a:r>
-          </a:p>
-        </p:txBody>
-      </p:sp>
-      <p:sp>
-        <p:nvSpPr>
-          <p:cNvPr id="10" name="TextBox 9"/>
+              <a:t>一、人员管理类高频合规性问题：着装，培训，外来人员管理，复核，隐瞒不报</a:t>
+            </a:r>
+          </a:p>
+          <a:p>
+            <a:pPr algn="l">
+              <a:lnSpc>
+                <a:spcPct val="114000"/>
+              </a:lnSpc>
+            </a:pPr>
+            <a:r>
+              <a:rPr sz="1540" b="0">
+                <a:solidFill>
+                  <a:srgbClr val="1A1A1A"/>
+                </a:solidFill>
+                <a:latin typeface="Arial"/>
+                <a:ea typeface="微软雅黑"/>
+                <a:cs typeface="Arial"/>
+              </a:rPr>
+              <a:t>二、物料、中间产品管理类（混淆、交叉污染）</a:t>
+            </a:r>
+          </a:p>
+          <a:p>
+            <a:pPr algn="l">
+              <a:lnSpc>
+                <a:spcPct val="114000"/>
+              </a:lnSpc>
+            </a:pPr>
+            <a:r>
+              <a:rPr sz="1540" b="0">
+                <a:solidFill>
+                  <a:srgbClr val="1A1A1A"/>
+                </a:solidFill>
+                <a:latin typeface="Arial"/>
+                <a:ea typeface="微软雅黑"/>
+                <a:cs typeface="Arial"/>
+              </a:rPr>
+              <a:t>三、工艺操作合规问题</a:t>
+            </a:r>
+          </a:p>
+          <a:p>
+            <a:pPr algn="l">
+              <a:lnSpc>
+                <a:spcPct val="114000"/>
+              </a:lnSpc>
+            </a:pPr>
+            <a:r>
+              <a:rPr sz="1540" b="0">
+                <a:solidFill>
+                  <a:srgbClr val="1A1A1A"/>
+                </a:solidFill>
+                <a:latin typeface="Arial"/>
+                <a:ea typeface="微软雅黑"/>
+                <a:cs typeface="Arial"/>
+              </a:rPr>
+              <a:t>四、设备、设施相关问题（衔接设备安全巡检）：状态，标识，清洁，跑冒滴漏，交叉污染；</a:t>
+            </a:r>
+          </a:p>
+          <a:p>
+            <a:pPr algn="l">
+              <a:lnSpc>
+                <a:spcPct val="114000"/>
+              </a:lnSpc>
+            </a:pPr>
+            <a:r>
+              <a:rPr sz="1540" b="0">
+                <a:solidFill>
+                  <a:srgbClr val="1A1A1A"/>
+                </a:solidFill>
+                <a:latin typeface="Arial"/>
+                <a:ea typeface="微软雅黑"/>
+                <a:cs typeface="Arial"/>
+              </a:rPr>
+              <a:t>五、洁净区环境与公用系统（无菌车间重灾区）</a:t>
+            </a:r>
+          </a:p>
+          <a:p>
+            <a:pPr algn="l">
+              <a:lnSpc>
+                <a:spcPct val="114000"/>
+              </a:lnSpc>
+            </a:pPr>
+            <a:r>
+              <a:rPr sz="1540" b="0">
+                <a:solidFill>
+                  <a:srgbClr val="1A1A1A"/>
+                </a:solidFill>
+                <a:latin typeface="Arial"/>
+                <a:ea typeface="微软雅黑"/>
+                <a:cs typeface="Arial"/>
+              </a:rPr>
+              <a:t>六、记录与文件缺陷（飞检第一关注重点）</a:t>
+            </a:r>
+          </a:p>
+          <a:p>
+            <a:pPr algn="l">
+              <a:lnSpc>
+                <a:spcPct val="114000"/>
+              </a:lnSpc>
+            </a:pPr>
+            <a:r>
+              <a:rPr sz="1540" b="0">
+                <a:solidFill>
+                  <a:srgbClr val="1A1A1A"/>
+                </a:solidFill>
+                <a:latin typeface="Arial"/>
+                <a:ea typeface="微软雅黑"/>
+                <a:cs typeface="Arial"/>
+              </a:rPr>
+              <a:t>七、计算机化系统 &amp; 数据完整性问题</a:t>
+            </a:r>
+          </a:p>
+          <a:p>
+            <a:pPr algn="l">
+              <a:lnSpc>
+                <a:spcPct val="114000"/>
+              </a:lnSpc>
+            </a:pPr>
+            <a:r>
+              <a:rPr sz="1540" b="0">
+                <a:solidFill>
+                  <a:srgbClr val="1A1A1A"/>
+                </a:solidFill>
+                <a:latin typeface="Arial"/>
+                <a:ea typeface="微软雅黑"/>
+                <a:cs typeface="Arial"/>
+              </a:rPr>
+              <a:t>八、质量体系工具落地问题（偏差、变更、CAPA、OOS瞒报，调查不充分）</a:t>
+            </a:r>
+          </a:p>
+          <a:p>
+            <a:pPr algn="l">
+              <a:lnSpc>
+                <a:spcPct val="114000"/>
+              </a:lnSpc>
+            </a:pPr>
+            <a:r>
+              <a:rPr sz="1540" b="0">
+                <a:solidFill>
+                  <a:srgbClr val="1A1A1A"/>
+                </a:solidFill>
+                <a:latin typeface="Arial"/>
+                <a:ea typeface="微软雅黑"/>
+                <a:cs typeface="Arial"/>
+              </a:rPr>
+              <a:t>九、现场 EHS 合规问题（GMP + 安全生产双重要求）</a:t>
+            </a:r>
+          </a:p>
+          <a:p>
+            <a:pPr algn="l">
+              <a:lnSpc>
+                <a:spcPct val="114000"/>
+              </a:lnSpc>
+              <a:spcBef>
+                <a:spcPts val="600"/>
+              </a:spcBef>
+            </a:pPr>
+            <a:r>
+              <a:rPr sz="1540" b="1">
+                <a:solidFill>
+                  <a:srgbClr val="FF0000"/>
+                </a:solidFill>
+                <a:latin typeface="Arial"/>
+                <a:ea typeface="微软雅黑"/>
+                <a:cs typeface="Arial"/>
+              </a:rPr>
+              <a:t>重大高风险缺陷（极易导致官方警告、停产）</a:t>
+            </a:r>
+          </a:p>
+          <a:p>
+            <a:pPr algn="l" marL="292608" indent="-292608">
+              <a:lnSpc>
+                <a:spcPct val="114000"/>
+              </a:lnSpc>
+              <a:buFont typeface="Arial"/>
+              <a:buChar char="●"/>
+            </a:pPr>
+            <a:r>
+              <a:rPr sz="1540" b="0">
+                <a:solidFill>
+                  <a:srgbClr val="1A1A1A"/>
+                </a:solidFill>
+                <a:latin typeface="Arial"/>
+                <a:ea typeface="微软雅黑"/>
+                <a:cs typeface="Arial"/>
+              </a:rPr>
+              <a:t>伪造、篡改生产 / 检验原始数据；共享账号规避系统管控</a:t>
+            </a:r>
+          </a:p>
+          <a:p>
+            <a:pPr algn="l" marL="292608" indent="-292608">
+              <a:lnSpc>
+                <a:spcPct val="114000"/>
+              </a:lnSpc>
+              <a:buFont typeface="Arial"/>
+              <a:buChar char="●"/>
+            </a:pPr>
+            <a:r>
+              <a:rPr sz="1540" b="0">
+                <a:solidFill>
+                  <a:srgbClr val="1A1A1A"/>
+                </a:solidFill>
+                <a:latin typeface="Arial"/>
+                <a:ea typeface="微软雅黑"/>
+                <a:cs typeface="Arial"/>
+              </a:rPr>
+              <a:t>未经 QA 放行物料投入生产</a:t>
+            </a:r>
+          </a:p>
+          <a:p>
+            <a:pPr algn="l" marL="292608" indent="-292608">
+              <a:lnSpc>
+                <a:spcPct val="114000"/>
+              </a:lnSpc>
+              <a:buFont typeface="Arial"/>
+              <a:buChar char="●"/>
+            </a:pPr>
+            <a:r>
+              <a:rPr sz="1540" b="0">
+                <a:solidFill>
+                  <a:srgbClr val="1A1A1A"/>
+                </a:solidFill>
+                <a:latin typeface="Arial"/>
+                <a:ea typeface="微软雅黑"/>
+                <a:cs typeface="Arial"/>
+              </a:rPr>
+              <a:t>隐瞒重大异常，不报偏差，继续生产产品</a:t>
+            </a:r>
+          </a:p>
+          <a:p>
+            <a:pPr algn="l" marL="292608" indent="-292608">
+              <a:lnSpc>
+                <a:spcPct val="114000"/>
+              </a:lnSpc>
+              <a:buFont typeface="Arial"/>
+              <a:buChar char="●"/>
+            </a:pPr>
+            <a:r>
+              <a:rPr sz="1540" b="0">
+                <a:solidFill>
+                  <a:srgbClr val="1A1A1A"/>
+                </a:solidFill>
+                <a:latin typeface="Arial"/>
+                <a:ea typeface="微软雅黑"/>
+                <a:cs typeface="Arial"/>
+              </a:rPr>
+              <a:t>拆除、屏蔽设备安全、工艺联锁装置</a:t>
+            </a:r>
+          </a:p>
+          <a:p>
+            <a:pPr algn="l" marL="292608" indent="-292608">
+              <a:lnSpc>
+                <a:spcPct val="114000"/>
+              </a:lnSpc>
+              <a:buFont typeface="Arial"/>
+              <a:buChar char="●"/>
+            </a:pPr>
+            <a:r>
+              <a:rPr sz="1540" b="0">
+                <a:solidFill>
+                  <a:srgbClr val="1A1A1A"/>
+                </a:solidFill>
+                <a:latin typeface="Arial"/>
+                <a:ea typeface="微软雅黑"/>
+                <a:cs typeface="Arial"/>
+              </a:rPr>
+              <a:t>跨品种生产未有效清场，存在严重交叉污染风险</a:t>
+            </a:r>
+          </a:p>
+          <a:p>
+            <a:pPr algn="l">
+              <a:lnSpc>
+                <a:spcPct val="114000"/>
+              </a:lnSpc>
+              <a:spcBef>
+                <a:spcPts val="400"/>
+              </a:spcBef>
+            </a:pPr>
+            <a:r>
+              <a:rPr sz="1540" b="1">
+                <a:solidFill>
+                  <a:srgbClr val="1A1A1A"/>
+                </a:solidFill>
+                <a:latin typeface="Arial"/>
+                <a:ea typeface="微软雅黑"/>
+                <a:cs typeface="Arial"/>
+              </a:rPr>
+              <a:t>主要一般缺陷（日常巡检最常见）</a:t>
+            </a:r>
+          </a:p>
+          <a:p>
+            <a:pPr algn="l" marL="292608" indent="-292608">
+              <a:lnSpc>
+                <a:spcPct val="114000"/>
+              </a:lnSpc>
+              <a:buFont typeface="Arial"/>
+              <a:buChar char="●"/>
+            </a:pPr>
+            <a:r>
+              <a:rPr sz="1540" b="0">
+                <a:solidFill>
+                  <a:srgbClr val="1A1A1A"/>
+                </a:solidFill>
+                <a:latin typeface="Arial"/>
+                <a:ea typeface="微软雅黑"/>
+                <a:cs typeface="Arial"/>
+              </a:rPr>
+              <a:t>记录填写不及时、信息不全；记录修改不规范</a:t>
+            </a:r>
+          </a:p>
+          <a:p>
+            <a:pPr algn="l" marL="292608" indent="-292608">
+              <a:lnSpc>
+                <a:spcPct val="114000"/>
+              </a:lnSpc>
+              <a:buFont typeface="Arial"/>
+              <a:buChar char="●"/>
+            </a:pPr>
+            <a:r>
+              <a:rPr sz="1540" b="0">
+                <a:solidFill>
+                  <a:srgbClr val="1A1A1A"/>
+                </a:solidFill>
+                <a:latin typeface="Arial"/>
+                <a:ea typeface="微软雅黑"/>
+                <a:cs typeface="Arial"/>
+              </a:rPr>
+              <a:t>物料标识不清、容器敞口存放</a:t>
+            </a:r>
+          </a:p>
+          <a:p>
+            <a:pPr algn="l" marL="292608" indent="-292608">
+              <a:lnSpc>
+                <a:spcPct val="114000"/>
+              </a:lnSpc>
+              <a:buFont typeface="Arial"/>
+              <a:buChar char="●"/>
+            </a:pPr>
+            <a:r>
+              <a:rPr sz="1540" b="0">
+                <a:solidFill>
+                  <a:srgbClr val="1A1A1A"/>
+                </a:solidFill>
+                <a:latin typeface="Arial"/>
+                <a:ea typeface="微软雅黑"/>
+                <a:cs typeface="Arial"/>
+              </a:rPr>
+              <a:t>洁净区人员行为违规、更衣不规范</a:t>
+            </a:r>
+          </a:p>
+          <a:p>
+            <a:pPr algn="l" marL="292608" indent="-292608">
+              <a:lnSpc>
+                <a:spcPct val="114000"/>
+              </a:lnSpc>
+              <a:buFont typeface="Arial"/>
+              <a:buChar char="●"/>
+            </a:pPr>
+            <a:r>
+              <a:rPr sz="1540" b="0">
+                <a:solidFill>
+                  <a:srgbClr val="1A1A1A"/>
+                </a:solidFill>
+                <a:latin typeface="Arial"/>
+                <a:ea typeface="微软雅黑"/>
+                <a:cs typeface="Arial"/>
+              </a:rPr>
+              <a:t>环境监测超标未调查；消毒管理不规范</a:t>
+            </a:r>
+          </a:p>
+          <a:p>
+            <a:pPr algn="l" marL="292608" indent="-292608">
+              <a:lnSpc>
+                <a:spcPct val="114000"/>
+              </a:lnSpc>
+              <a:buFont typeface="Arial"/>
+              <a:buChar char="●"/>
+            </a:pPr>
+            <a:r>
+              <a:rPr sz="1540" b="0">
+                <a:solidFill>
+                  <a:srgbClr val="1A1A1A"/>
+                </a:solidFill>
+                <a:latin typeface="Arial"/>
+                <a:ea typeface="微软雅黑"/>
+                <a:cs typeface="Arial"/>
+              </a:rPr>
+              <a:t>维保、巡检记录漏记；计量器具临近 / 超校准周期</a:t>
+            </a:r>
+          </a:p>
+          <a:p>
+            <a:pPr algn="l" marL="292608" indent="-292608">
+              <a:lnSpc>
+                <a:spcPct val="114000"/>
+              </a:lnSpc>
+              <a:buFont typeface="Arial"/>
+              <a:buChar char="●"/>
+            </a:pPr>
+            <a:r>
+              <a:rPr sz="1540" b="0">
+                <a:solidFill>
+                  <a:srgbClr val="1A1A1A"/>
+                </a:solidFill>
+                <a:latin typeface="Arial"/>
+                <a:ea typeface="微软雅黑"/>
+                <a:cs typeface="Arial"/>
+              </a:rPr>
+              <a:t>审计追踪仅开启，未实施周期性审核</a:t>
+            </a:r>
+          </a:p>
+        </p:txBody>
+      </p:sp>
+      <p:sp>
+        <p:nvSpPr>
+          <p:cNvPr id="9" name="Rounded Rectangle 8"/>
+          <p:cNvSpPr/>
+          <p:nvPr/>
+        </p:nvSpPr>
+        <p:spPr>
+          <a:xfrm>
+            <a:off x="12298710" y="1645924"/>
+            <a:ext cx="11164851" cy="6661237"/>
+          </a:xfrm>
+          <a:prstGeom prst="roundRect">
+            <a:avLst>
+              <a:gd name="adj" fmla="val 4000"/>
+            </a:avLst>
+          </a:prstGeom>
+          <a:solidFill>
+            <a:srgbClr val="F7F9FD"/>
+          </a:solidFill>
+          <a:ln w="25400">
+            <a:solidFill>
+              <a:srgbClr val="C5D0E6"/>
+            </a:solidFill>
+          </a:ln>
+          <a:effectLst>
+            <a:outerShdw blurRad="76200" dist="38100" dir="5400000" rotWithShape="0">
+              <a:srgbClr val="000000">
+                <a:alpha val="18000"/>
+              </a:srgbClr>
+            </a:outerShdw>
+          </a:effectLst>
+        </p:spPr>
+        <p:style>
+          <a:lnRef idx="1">
+            <a:schemeClr val="accent1"/>
+          </a:lnRef>
+          <a:fillRef idx="3">
+            <a:schemeClr val="accent1"/>
+          </a:fillRef>
+          <a:effectRef idx="2">
+            <a:schemeClr val="accent1"/>
+          </a:effectRef>
+          <a:fontRef idx="minor">
+            <a:schemeClr val="lt1"/>
+          </a:fontRef>
+        </p:style>
+        <p:txBody>
+          <a:bodyPr rtlCol="0" anchor="ctr" wrap="square"/>
+          <a:lstStyle/>
+          <a:p>
+            <a:pPr algn="ctr"/>
+          </a:p>
+        </p:txBody>
+      </p:sp>
+      <p:sp>
+        <p:nvSpPr>
+          <p:cNvPr id="10" name="Rectangle 9"/>
+          <p:cNvSpPr/>
+          <p:nvPr/>
+        </p:nvSpPr>
+        <p:spPr>
+          <a:xfrm>
+            <a:off x="12298710" y="1645924"/>
+            <a:ext cx="109728" cy="6661237"/>
+          </a:xfrm>
+          <a:prstGeom prst="rect">
+            <a:avLst/>
+          </a:prstGeom>
+          <a:solidFill>
+            <a:srgbClr val="1D42E1"/>
+          </a:solidFill>
+          <a:ln>
+            <a:noFill/>
+          </a:ln>
+          <a:effectLst/>
+        </p:spPr>
+        <p:style>
+          <a:lnRef idx="1">
+            <a:schemeClr val="accent1"/>
+          </a:lnRef>
+          <a:fillRef idx="3">
+            <a:schemeClr val="accent1"/>
+          </a:fillRef>
+          <a:effectRef idx="2">
+            <a:schemeClr val="accent1"/>
+          </a:effectRef>
+          <a:fontRef idx="minor">
+            <a:schemeClr val="lt1"/>
+          </a:fontRef>
+        </p:style>
+        <p:txBody>
+          <a:bodyPr rtlCol="0" anchor="ctr" wrap="square"/>
+          <a:lstStyle/>
+          <a:p>
+            <a:pPr algn="ctr"/>
+          </a:p>
+        </p:txBody>
+      </p:sp>
+      <p:sp>
+        <p:nvSpPr>
+          <p:cNvPr id="11" name="TextBox 10"/>
           <p:cNvSpPr txBox="1"/>
           <p:nvPr/>
         </p:nvSpPr>
         <p:spPr>
           <a:xfrm>
-            <a:off x="8421645" y="2523750"/>
-            <a:ext cx="3538736" cy="841250"/>
+            <a:off x="12591319" y="1682500"/>
+            <a:ext cx="1499619" cy="804674"/>
           </a:xfrm>
           <a:prstGeom prst="rect">
             <a:avLst/>
@@ -7388,11 +7454,11 @@
           <a:p>
             <a:pPr algn="l">
               <a:lnSpc>
-                <a:spcPct val="112000"/>
+                <a:spcPct val="128000"/>
               </a:lnSpc>
             </a:pPr>
             <a:r>
-              <a:rPr sz="1760" b="1" i="0">
+              <a:rPr sz="4800" b="1" i="0">
                 <a:solidFill>
                   <a:srgbClr val="132556"/>
                 </a:solidFill>
@@ -7400,46 +7466,11 @@
                 <a:ea typeface="微软雅黑"/>
                 <a:cs typeface="Arial"/>
               </a:rPr>
-              <a:t>QC 实验室常见 GMP 违规行为</a:t>
-            </a:r>
-          </a:p>
-        </p:txBody>
-      </p:sp>
-      <p:cxnSp>
-        <p:nvCxnSpPr>
-          <p:cNvPr id="11" name="Connector 10"/>
-          <p:cNvCxnSpPr/>
-          <p:nvPr/>
-        </p:nvCxnSpPr>
-        <p:spPr>
-          <a:xfrm>
-            <a:off x="7141481" y="3438152"/>
-            <a:ext cx="0" cy="9107447"/>
-          </a:xfrm>
-          <a:prstGeom prst="line">
-            <a:avLst/>
-          </a:prstGeom>
-          <a:ln w="34290">
-            <a:solidFill>
-              <a:srgbClr val="1D42E1"/>
-            </a:solidFill>
-          </a:ln>
-        </p:spPr>
-        <p:style>
-          <a:lnRef idx="2">
-            <a:schemeClr val="accent1"/>
-          </a:lnRef>
-          <a:fillRef idx="0">
-            <a:schemeClr val="accent1"/>
-          </a:fillRef>
-          <a:effectRef idx="1">
-            <a:schemeClr val="accent1"/>
-          </a:effectRef>
-          <a:fontRef idx="minor">
-            <a:schemeClr val="tx1"/>
-          </a:fontRef>
-        </p:style>
-      </p:cxnSp>
+              <a:t>02</a:t>
+            </a:r>
+          </a:p>
+        </p:txBody>
+      </p:sp>
       <p:sp>
         <p:nvSpPr>
           <p:cNvPr id="12" name="TextBox 11"/>
@@ -7448,8 +7479,8 @@
         </p:nvSpPr>
         <p:spPr>
           <a:xfrm>
-            <a:off x="7397514" y="3511304"/>
-            <a:ext cx="4526291" cy="8997718"/>
+            <a:off x="14036075" y="1755652"/>
+            <a:ext cx="9061726" cy="658369"/>
           </a:xfrm>
           <a:prstGeom prst="rect">
             <a:avLst/>
@@ -7457,248 +7488,26 @@
           <a:noFill/>
         </p:spPr>
         <p:txBody>
-          <a:bodyPr wrap="square" lIns="0" rIns="0" tIns="0" bIns="0" anchor="t">
+          <a:bodyPr wrap="square" lIns="0" rIns="0" tIns="0" bIns="0" anchor="ctr">
             <a:spAutoFit/>
           </a:bodyPr>
           <a:lstStyle/>
           <a:p>
             <a:pPr algn="l">
               <a:lnSpc>
-                <a:spcPct val="115000"/>
+                <a:spcPct val="108000"/>
               </a:lnSpc>
             </a:pPr>
             <a:r>
-              <a:rPr sz="1220" b="0">
-                <a:solidFill>
-                  <a:srgbClr val="1A1A1A"/>
+              <a:rPr sz="2400" b="1" i="0">
+                <a:solidFill>
+                  <a:srgbClr val="132556"/>
                 </a:solidFill>
                 <a:latin typeface="Arial"/>
                 <a:ea typeface="微软雅黑"/>
                 <a:cs typeface="Arial"/>
               </a:rPr>
-              <a:t>一、样品管理类（高频问题）；</a:t>
-            </a:r>
-          </a:p>
-          <a:p>
-            <a:pPr algn="l">
-              <a:lnSpc>
-                <a:spcPct val="115000"/>
-              </a:lnSpc>
-            </a:pPr>
-            <a:r>
-              <a:rPr sz="1220" b="0">
-                <a:solidFill>
-                  <a:srgbClr val="1A1A1A"/>
-                </a:solidFill>
-                <a:latin typeface="Arial"/>
-                <a:ea typeface="微软雅黑"/>
-                <a:cs typeface="Arial"/>
-              </a:rPr>
-              <a:t>二、检验操作行为违规</a:t>
-            </a:r>
-          </a:p>
-          <a:p>
-            <a:pPr algn="l">
-              <a:lnSpc>
-                <a:spcPct val="115000"/>
-              </a:lnSpc>
-            </a:pPr>
-            <a:r>
-              <a:rPr sz="1220" b="0">
-                <a:solidFill>
-                  <a:srgbClr val="1A1A1A"/>
-                </a:solidFill>
-                <a:latin typeface="Arial"/>
-                <a:ea typeface="微软雅黑"/>
-                <a:cs typeface="Arial"/>
-              </a:rPr>
-              <a:t>三、原始记录与数据完整性（GMP 红线，重大违规）</a:t>
-            </a:r>
-          </a:p>
-          <a:p>
-            <a:pPr algn="l">
-              <a:lnSpc>
-                <a:spcPct val="115000"/>
-              </a:lnSpc>
-            </a:pPr>
-            <a:r>
-              <a:rPr sz="1220" b="0">
-                <a:solidFill>
-                  <a:srgbClr val="1A1A1A"/>
-                </a:solidFill>
-                <a:latin typeface="Arial"/>
-                <a:ea typeface="微软雅黑"/>
-                <a:cs typeface="Arial"/>
-              </a:rPr>
-              <a:t>四、仪器设备管理违规；</a:t>
-            </a:r>
-          </a:p>
-          <a:p>
-            <a:pPr algn="l">
-              <a:lnSpc>
-                <a:spcPct val="115000"/>
-              </a:lnSpc>
-            </a:pPr>
-            <a:r>
-              <a:rPr sz="1220" b="0">
-                <a:solidFill>
-                  <a:srgbClr val="1A1A1A"/>
-                </a:solidFill>
-                <a:latin typeface="Arial"/>
-                <a:ea typeface="微软雅黑"/>
-                <a:cs typeface="Arial"/>
-              </a:rPr>
-              <a:t>五、试剂、试液、标准品、培养基管理；</a:t>
-            </a:r>
-          </a:p>
-          <a:p>
-            <a:pPr algn="l">
-              <a:lnSpc>
-                <a:spcPct val="115000"/>
-              </a:lnSpc>
-            </a:pPr>
-            <a:r>
-              <a:rPr sz="1220" b="0">
-                <a:solidFill>
-                  <a:srgbClr val="1A1A1A"/>
-                </a:solidFill>
-                <a:latin typeface="Arial"/>
-                <a:ea typeface="微软雅黑"/>
-                <a:cs typeface="Arial"/>
-              </a:rPr>
-              <a:t>六、实验室环境、清洁消毒、微生物专项违规</a:t>
-            </a:r>
-          </a:p>
-          <a:p>
-            <a:pPr algn="l">
-              <a:lnSpc>
-                <a:spcPct val="115000"/>
-              </a:lnSpc>
-            </a:pPr>
-            <a:r>
-              <a:rPr sz="1220" b="0">
-                <a:solidFill>
-                  <a:srgbClr val="1A1A1A"/>
-                </a:solidFill>
-                <a:latin typeface="Arial"/>
-                <a:ea typeface="微软雅黑"/>
-                <a:cs typeface="Arial"/>
-              </a:rPr>
-              <a:t>七、文件、报告、偏差 OOS 管理，调查</a:t>
-            </a:r>
-          </a:p>
-          <a:p>
-            <a:pPr algn="l">
-              <a:lnSpc>
-                <a:spcPct val="115000"/>
-              </a:lnSpc>
-            </a:pPr>
-            <a:r>
-              <a:rPr sz="1220" b="0">
-                <a:solidFill>
-                  <a:srgbClr val="1A1A1A"/>
-                </a:solidFill>
-                <a:latin typeface="Arial"/>
-                <a:ea typeface="微软雅黑"/>
-                <a:cs typeface="Arial"/>
-              </a:rPr>
-              <a:t>八、人员卫生与行为规范</a:t>
-            </a:r>
-          </a:p>
-          <a:p>
-            <a:pPr algn="l">
-              <a:lnSpc>
-                <a:spcPct val="115000"/>
-              </a:lnSpc>
-              <a:spcBef>
-                <a:spcPts val="1000"/>
-              </a:spcBef>
-            </a:pPr>
-            <a:r>
-              <a:rPr sz="1220" b="1">
-                <a:solidFill>
-                  <a:srgbClr val="FF0000"/>
-                </a:solidFill>
-                <a:latin typeface="Arial"/>
-                <a:ea typeface="微软雅黑"/>
-                <a:cs typeface="Arial"/>
-              </a:rPr>
-              <a:t>重大高风险缺陷：</a:t>
-            </a:r>
-            <a:r>
-              <a:rPr sz="1220" b="0">
-                <a:solidFill>
-                  <a:srgbClr val="1A1A1A"/>
-                </a:solidFill>
-                <a:latin typeface="Arial"/>
-                <a:ea typeface="微软雅黑"/>
-                <a:cs typeface="Arial"/>
-              </a:rPr>
-              <a:t>伪造数据、删除图谱、共用账号、隐瞒 OOS 结果、擅自更改检验方法、挪用留样</a:t>
-            </a:r>
-          </a:p>
-          <a:p>
-            <a:pPr algn="l">
-              <a:lnSpc>
-                <a:spcPct val="115000"/>
-              </a:lnSpc>
-              <a:spcBef>
-                <a:spcPts val="600"/>
-              </a:spcBef>
-            </a:pPr>
-            <a:r>
-              <a:rPr sz="1220" b="1">
-                <a:solidFill>
-                  <a:srgbClr val="1A1A1A"/>
-                </a:solidFill>
-                <a:latin typeface="Arial"/>
-                <a:ea typeface="微软雅黑"/>
-                <a:cs typeface="Arial"/>
-              </a:rPr>
-              <a:t>一般违规：</a:t>
-            </a:r>
-            <a:r>
-              <a:rPr sz="1220" b="0">
-                <a:solidFill>
-                  <a:srgbClr val="1A1A1A"/>
-                </a:solidFill>
-                <a:latin typeface="Arial"/>
-                <a:ea typeface="微软雅黑"/>
-                <a:cs typeface="Arial"/>
-              </a:rPr>
-              <a:t>样品存放条件不达标、漏做仪器日常核查、试剂标识不全、未及时填写设备日志；</a:t>
-            </a:r>
-          </a:p>
-          <a:p>
-            <a:pPr algn="l">
-              <a:lnSpc>
-                <a:spcPct val="115000"/>
-              </a:lnSpc>
-              <a:spcBef>
-                <a:spcPts val="600"/>
-              </a:spcBef>
-            </a:pPr>
-            <a:r>
-              <a:rPr sz="1220" b="1">
-                <a:solidFill>
-                  <a:srgbClr val="1A1A1A"/>
-                </a:solidFill>
-                <a:latin typeface="Arial"/>
-                <a:ea typeface="微软雅黑"/>
-                <a:cs typeface="Arial"/>
-              </a:rPr>
-              <a:t>轻微违规：</a:t>
-            </a:r>
-            <a:r>
-              <a:rPr sz="1220" b="0">
-                <a:solidFill>
-                  <a:srgbClr val="1A1A1A"/>
-                </a:solidFill>
-                <a:latin typeface="Arial"/>
-                <a:ea typeface="微软雅黑"/>
-                <a:cs typeface="Arial"/>
-              </a:rPr>
-              <a:t>记录书写不规范、物品摆放杂乱、清洁不及时、标识粘贴不整齐；</a:t>
+              <a:t>QC 实验室常见 GMP 违规行为</a:t>
             </a:r>
           </a:p>
         </p:txBody>
@@ -7711,8 +7520,8 @@
         </p:nvCxnSpPr>
         <p:spPr>
           <a:xfrm>
-            <a:off x="12216414" y="2596902"/>
-            <a:ext cx="0" cy="9875545"/>
+            <a:off x="12591319" y="2523750"/>
+            <a:ext cx="10616211" cy="0"/>
           </a:xfrm>
           <a:prstGeom prst="line">
             <a:avLst/>
@@ -7746,8 +7555,8 @@
         </p:nvSpPr>
         <p:spPr>
           <a:xfrm>
-            <a:off x="12362718" y="2340869"/>
-            <a:ext cx="1426467" cy="1060706"/>
+            <a:off x="12664471" y="2633478"/>
+            <a:ext cx="10506482" cy="5527378"/>
           </a:xfrm>
           <a:prstGeom prst="rect">
             <a:avLst/>
@@ -7755,40 +7564,360 @@
           <a:noFill/>
         </p:spPr>
         <p:txBody>
-          <a:bodyPr wrap="square" lIns="0" rIns="0" tIns="0" bIns="0" anchor="ctr">
+          <a:bodyPr wrap="square" lIns="0" rIns="0" tIns="0" bIns="0" anchor="t">
             <a:spAutoFit/>
           </a:bodyPr>
           <a:lstStyle/>
           <a:p>
             <a:pPr algn="l">
               <a:lnSpc>
-                <a:spcPct val="128000"/>
+                <a:spcPct val="114000"/>
               </a:lnSpc>
             </a:pPr>
             <a:r>
-              <a:rPr sz="4800" b="1" i="0">
-                <a:solidFill>
-                  <a:srgbClr val="132556"/>
+              <a:rPr sz="1800" b="0">
+                <a:solidFill>
+                  <a:srgbClr val="1A1A1A"/>
                 </a:solidFill>
                 <a:latin typeface="Arial"/>
                 <a:ea typeface="微软雅黑"/>
                 <a:cs typeface="Arial"/>
               </a:rPr>
-              <a:t>03</a:t>
-            </a:r>
-          </a:p>
-        </p:txBody>
-      </p:sp>
-      <p:sp>
-        <p:nvSpPr>
-          <p:cNvPr id="15" name="TextBox 14"/>
+              <a:t>一、样品管理类（高频问题）；</a:t>
+            </a:r>
+          </a:p>
+          <a:p>
+            <a:pPr algn="l">
+              <a:lnSpc>
+                <a:spcPct val="114000"/>
+              </a:lnSpc>
+            </a:pPr>
+            <a:r>
+              <a:rPr sz="1800" b="0">
+                <a:solidFill>
+                  <a:srgbClr val="1A1A1A"/>
+                </a:solidFill>
+                <a:latin typeface="Arial"/>
+                <a:ea typeface="微软雅黑"/>
+                <a:cs typeface="Arial"/>
+              </a:rPr>
+              <a:t>二、检验操作行为违规</a:t>
+            </a:r>
+          </a:p>
+          <a:p>
+            <a:pPr algn="l">
+              <a:lnSpc>
+                <a:spcPct val="114000"/>
+              </a:lnSpc>
+            </a:pPr>
+            <a:r>
+              <a:rPr sz="1800" b="0">
+                <a:solidFill>
+                  <a:srgbClr val="1A1A1A"/>
+                </a:solidFill>
+                <a:latin typeface="Arial"/>
+                <a:ea typeface="微软雅黑"/>
+                <a:cs typeface="Arial"/>
+              </a:rPr>
+              <a:t>三、原始记录与数据完整性（GMP 红线，重大违规）</a:t>
+            </a:r>
+          </a:p>
+          <a:p>
+            <a:pPr algn="l">
+              <a:lnSpc>
+                <a:spcPct val="114000"/>
+              </a:lnSpc>
+            </a:pPr>
+            <a:r>
+              <a:rPr sz="1800" b="0">
+                <a:solidFill>
+                  <a:srgbClr val="1A1A1A"/>
+                </a:solidFill>
+                <a:latin typeface="Arial"/>
+                <a:ea typeface="微软雅黑"/>
+                <a:cs typeface="Arial"/>
+              </a:rPr>
+              <a:t>四、仪器设备管理违规；</a:t>
+            </a:r>
+          </a:p>
+          <a:p>
+            <a:pPr algn="l">
+              <a:lnSpc>
+                <a:spcPct val="114000"/>
+              </a:lnSpc>
+            </a:pPr>
+            <a:r>
+              <a:rPr sz="1800" b="0">
+                <a:solidFill>
+                  <a:srgbClr val="1A1A1A"/>
+                </a:solidFill>
+                <a:latin typeface="Arial"/>
+                <a:ea typeface="微软雅黑"/>
+                <a:cs typeface="Arial"/>
+              </a:rPr>
+              <a:t>五、试剂、试液、标准品、培养基管理；</a:t>
+            </a:r>
+          </a:p>
+          <a:p>
+            <a:pPr algn="l">
+              <a:lnSpc>
+                <a:spcPct val="114000"/>
+              </a:lnSpc>
+            </a:pPr>
+            <a:r>
+              <a:rPr sz="1800" b="0">
+                <a:solidFill>
+                  <a:srgbClr val="1A1A1A"/>
+                </a:solidFill>
+                <a:latin typeface="Arial"/>
+                <a:ea typeface="微软雅黑"/>
+                <a:cs typeface="Arial"/>
+              </a:rPr>
+              <a:t>六、实验室环境、清洁消毒、微生物专项违规</a:t>
+            </a:r>
+          </a:p>
+          <a:p>
+            <a:pPr algn="l">
+              <a:lnSpc>
+                <a:spcPct val="114000"/>
+              </a:lnSpc>
+            </a:pPr>
+            <a:r>
+              <a:rPr sz="1800" b="0">
+                <a:solidFill>
+                  <a:srgbClr val="1A1A1A"/>
+                </a:solidFill>
+                <a:latin typeface="Arial"/>
+                <a:ea typeface="微软雅黑"/>
+                <a:cs typeface="Arial"/>
+              </a:rPr>
+              <a:t>七、文件、报告、偏差 OOS 管理，调查</a:t>
+            </a:r>
+          </a:p>
+          <a:p>
+            <a:pPr algn="l">
+              <a:lnSpc>
+                <a:spcPct val="114000"/>
+              </a:lnSpc>
+            </a:pPr>
+            <a:r>
+              <a:rPr sz="1800" b="0">
+                <a:solidFill>
+                  <a:srgbClr val="1A1A1A"/>
+                </a:solidFill>
+                <a:latin typeface="Arial"/>
+                <a:ea typeface="微软雅黑"/>
+                <a:cs typeface="Arial"/>
+              </a:rPr>
+              <a:t>八、人员卫生与行为规范</a:t>
+            </a:r>
+          </a:p>
+          <a:p>
+            <a:pPr algn="l">
+              <a:lnSpc>
+                <a:spcPct val="114000"/>
+              </a:lnSpc>
+              <a:spcBef>
+                <a:spcPts val="1000"/>
+              </a:spcBef>
+            </a:pPr>
+            <a:r>
+              <a:rPr sz="1800" b="1">
+                <a:solidFill>
+                  <a:srgbClr val="FF0000"/>
+                </a:solidFill>
+                <a:latin typeface="Arial"/>
+                <a:ea typeface="微软雅黑"/>
+                <a:cs typeface="Arial"/>
+              </a:rPr>
+              <a:t>重大高风险缺陷：</a:t>
+            </a:r>
+            <a:r>
+              <a:rPr sz="1800" b="0">
+                <a:solidFill>
+                  <a:srgbClr val="1A1A1A"/>
+                </a:solidFill>
+                <a:latin typeface="Arial"/>
+                <a:ea typeface="微软雅黑"/>
+                <a:cs typeface="Arial"/>
+              </a:rPr>
+              <a:t>伪造数据、删除图谱、共用账号、隐瞒 OOS 结果、擅自更改检验方法、挪用留样</a:t>
+            </a:r>
+          </a:p>
+          <a:p>
+            <a:pPr algn="l">
+              <a:lnSpc>
+                <a:spcPct val="114000"/>
+              </a:lnSpc>
+              <a:spcBef>
+                <a:spcPts val="600"/>
+              </a:spcBef>
+            </a:pPr>
+            <a:r>
+              <a:rPr sz="1800" b="1">
+                <a:solidFill>
+                  <a:srgbClr val="1A1A1A"/>
+                </a:solidFill>
+                <a:latin typeface="Arial"/>
+                <a:ea typeface="微软雅黑"/>
+                <a:cs typeface="Arial"/>
+              </a:rPr>
+              <a:t>一般违规：</a:t>
+            </a:r>
+            <a:r>
+              <a:rPr sz="1800" b="0">
+                <a:solidFill>
+                  <a:srgbClr val="1A1A1A"/>
+                </a:solidFill>
+                <a:latin typeface="Arial"/>
+                <a:ea typeface="微软雅黑"/>
+                <a:cs typeface="Arial"/>
+              </a:rPr>
+              <a:t>样品存放条件不达标、漏做仪器日常核查、试剂标识不全、未及时填写设备日志；</a:t>
+            </a:r>
+          </a:p>
+          <a:p>
+            <a:pPr algn="l">
+              <a:lnSpc>
+                <a:spcPct val="114000"/>
+              </a:lnSpc>
+              <a:spcBef>
+                <a:spcPts val="600"/>
+              </a:spcBef>
+            </a:pPr>
+            <a:r>
+              <a:rPr sz="1800" b="1">
+                <a:solidFill>
+                  <a:srgbClr val="1A1A1A"/>
+                </a:solidFill>
+                <a:latin typeface="Arial"/>
+                <a:ea typeface="微软雅黑"/>
+                <a:cs typeface="Arial"/>
+              </a:rPr>
+              <a:t>轻微违规：</a:t>
+            </a:r>
+            <a:r>
+              <a:rPr sz="1800" b="0">
+                <a:solidFill>
+                  <a:srgbClr val="1A1A1A"/>
+                </a:solidFill>
+                <a:latin typeface="Arial"/>
+                <a:ea typeface="微软雅黑"/>
+                <a:cs typeface="Arial"/>
+              </a:rPr>
+              <a:t>记录书写不规范、物品摆放杂乱、清洁不及时、标识粘贴不整齐；</a:t>
+            </a:r>
+          </a:p>
+        </p:txBody>
+      </p:sp>
+      <p:sp>
+        <p:nvSpPr>
+          <p:cNvPr id="15" name="Rounded Rectangle 14"/>
+          <p:cNvSpPr/>
+          <p:nvPr/>
+        </p:nvSpPr>
+        <p:spPr>
+          <a:xfrm>
+            <a:off x="914402" y="8490042"/>
+            <a:ext cx="11164851" cy="4640774"/>
+          </a:xfrm>
+          <a:prstGeom prst="roundRect">
+            <a:avLst>
+              <a:gd name="adj" fmla="val 4000"/>
+            </a:avLst>
+          </a:prstGeom>
+          <a:solidFill>
+            <a:srgbClr val="F7F9FD"/>
+          </a:solidFill>
+          <a:ln w="25400">
+            <a:solidFill>
+              <a:srgbClr val="C5D0E6"/>
+            </a:solidFill>
+          </a:ln>
+          <a:effectLst>
+            <a:outerShdw blurRad="76200" dist="38100" dir="5400000" rotWithShape="0">
+              <a:srgbClr val="000000">
+                <a:alpha val="18000"/>
+              </a:srgbClr>
+            </a:outerShdw>
+          </a:effectLst>
+        </p:spPr>
+        <p:style>
+          <a:lnRef idx="1">
+            <a:schemeClr val="accent1"/>
+          </a:lnRef>
+          <a:fillRef idx="3">
+            <a:schemeClr val="accent1"/>
+          </a:fillRef>
+          <a:effectRef idx="2">
+            <a:schemeClr val="accent1"/>
+          </a:effectRef>
+          <a:fontRef idx="minor">
+            <a:schemeClr val="lt1"/>
+          </a:fontRef>
+        </p:style>
+        <p:txBody>
+          <a:bodyPr rtlCol="0" anchor="ctr" wrap="square"/>
+          <a:lstStyle/>
+          <a:p>
+            <a:pPr algn="ctr"/>
+          </a:p>
+        </p:txBody>
+      </p:sp>
+      <p:sp>
+        <p:nvSpPr>
+          <p:cNvPr id="16" name="Rectangle 15"/>
+          <p:cNvSpPr/>
+          <p:nvPr/>
+        </p:nvSpPr>
+        <p:spPr>
+          <a:xfrm>
+            <a:off x="914402" y="8490042"/>
+            <a:ext cx="109728" cy="4640774"/>
+          </a:xfrm>
+          <a:prstGeom prst="rect">
+            <a:avLst/>
+          </a:prstGeom>
+          <a:solidFill>
+            <a:srgbClr val="1D42E1"/>
+          </a:solidFill>
+          <a:ln>
+            <a:noFill/>
+          </a:ln>
+          <a:effectLst/>
+        </p:spPr>
+        <p:style>
+          <a:lnRef idx="1">
+            <a:schemeClr val="accent1"/>
+          </a:lnRef>
+          <a:fillRef idx="3">
+            <a:schemeClr val="accent1"/>
+          </a:fillRef>
+          <a:effectRef idx="2">
+            <a:schemeClr val="accent1"/>
+          </a:effectRef>
+          <a:fontRef idx="minor">
+            <a:schemeClr val="lt1"/>
+          </a:fontRef>
+        </p:style>
+        <p:txBody>
+          <a:bodyPr rtlCol="0" anchor="ctr" wrap="square"/>
+          <a:lstStyle/>
+          <a:p>
+            <a:pPr algn="ctr"/>
+          </a:p>
+        </p:txBody>
+      </p:sp>
+      <p:sp>
+        <p:nvSpPr>
+          <p:cNvPr id="17" name="TextBox 16"/>
           <p:cNvSpPr txBox="1"/>
           <p:nvPr/>
         </p:nvSpPr>
         <p:spPr>
           <a:xfrm>
-            <a:off x="13789186" y="2523750"/>
-            <a:ext cx="3538736" cy="841250"/>
+            <a:off x="1207011" y="8526618"/>
+            <a:ext cx="1499619" cy="804674"/>
           </a:xfrm>
           <a:prstGeom prst="rect">
             <a:avLst/>
@@ -7803,11 +7932,11 @@
           <a:p>
             <a:pPr algn="l">
               <a:lnSpc>
-                <a:spcPct val="112000"/>
+                <a:spcPct val="128000"/>
               </a:lnSpc>
             </a:pPr>
             <a:r>
-              <a:rPr sz="1760" b="1" i="0">
+              <a:rPr sz="4800" b="1" i="0">
                 <a:solidFill>
                   <a:srgbClr val="132556"/>
                 </a:solidFill>
@@ -7815,56 +7944,21 @@
                 <a:ea typeface="微软雅黑"/>
                 <a:cs typeface="Arial"/>
               </a:rPr>
-              <a:t>计算机化系统</a:t>
-            </a:r>
-          </a:p>
-        </p:txBody>
-      </p:sp>
-      <p:cxnSp>
-        <p:nvCxnSpPr>
-          <p:cNvPr id="16" name="Connector 15"/>
-          <p:cNvCxnSpPr/>
+              <a:t>03</a:t>
+            </a:r>
+          </a:p>
+        </p:txBody>
+      </p:sp>
+      <p:sp>
+        <p:nvSpPr>
+          <p:cNvPr id="18" name="TextBox 17"/>
+          <p:cNvSpPr txBox="1"/>
           <p:nvPr/>
-        </p:nvCxnSpPr>
+        </p:nvSpPr>
         <p:spPr>
           <a:xfrm>
-            <a:off x="12509023" y="3438152"/>
-            <a:ext cx="0" cy="9107447"/>
-          </a:xfrm>
-          <a:prstGeom prst="line">
-            <a:avLst/>
-          </a:prstGeom>
-          <a:ln w="34290">
-            <a:solidFill>
-              <a:srgbClr val="1D42E1"/>
-            </a:solidFill>
-          </a:ln>
-        </p:spPr>
-        <p:style>
-          <a:lnRef idx="2">
-            <a:schemeClr val="accent1"/>
-          </a:lnRef>
-          <a:fillRef idx="0">
-            <a:schemeClr val="accent1"/>
-          </a:fillRef>
-          <a:effectRef idx="1">
-            <a:schemeClr val="accent1"/>
-          </a:effectRef>
-          <a:fontRef idx="minor">
-            <a:schemeClr val="tx1"/>
-          </a:fontRef>
-        </p:style>
-      </p:cxnSp>
-      <p:sp>
-        <p:nvSpPr>
-          <p:cNvPr id="17" name="TextBox 16"/>
-          <p:cNvSpPr txBox="1"/>
-          <p:nvPr/>
-        </p:nvSpPr>
-        <p:spPr>
-          <a:xfrm>
-            <a:off x="12765055" y="3511304"/>
-            <a:ext cx="4526291" cy="8997718"/>
+            <a:off x="2651766" y="8599770"/>
+            <a:ext cx="9061726" cy="658369"/>
           </a:xfrm>
           <a:prstGeom prst="rect">
             <a:avLst/>
@@ -7872,238 +7966,40 @@
           <a:noFill/>
         </p:spPr>
         <p:txBody>
-          <a:bodyPr wrap="square" lIns="0" rIns="0" tIns="0" bIns="0" anchor="t">
+          <a:bodyPr wrap="square" lIns="0" rIns="0" tIns="0" bIns="0" anchor="ctr">
             <a:spAutoFit/>
           </a:bodyPr>
           <a:lstStyle/>
           <a:p>
             <a:pPr algn="l">
               <a:lnSpc>
-                <a:spcPct val="115000"/>
+                <a:spcPct val="108000"/>
               </a:lnSpc>
             </a:pPr>
             <a:r>
-              <a:rPr sz="1220" b="0">
-                <a:solidFill>
-                  <a:srgbClr val="1A1A1A"/>
+              <a:rPr sz="2400" b="1" i="0">
+                <a:solidFill>
+                  <a:srgbClr val="132556"/>
                 </a:solidFill>
                 <a:latin typeface="Arial"/>
                 <a:ea typeface="微软雅黑"/>
                 <a:cs typeface="Arial"/>
               </a:rPr>
-              <a:t>一、用户访问与账号权限持续管理</a:t>
-            </a:r>
-          </a:p>
-          <a:p>
-            <a:pPr algn="l">
-              <a:lnSpc>
-                <a:spcPct val="115000"/>
-              </a:lnSpc>
-            </a:pPr>
-            <a:r>
-              <a:rPr sz="1220" b="0">
-                <a:solidFill>
-                  <a:srgbClr val="1A1A1A"/>
-                </a:solidFill>
-                <a:latin typeface="Arial"/>
-                <a:ea typeface="微软雅黑"/>
-                <a:cs typeface="Arial"/>
-              </a:rPr>
-              <a:t>二、审计追踪（Audit Trail）常态化管理（核查高频重点）</a:t>
-            </a:r>
-          </a:p>
-          <a:p>
-            <a:pPr algn="l">
-              <a:lnSpc>
-                <a:spcPct val="115000"/>
-              </a:lnSpc>
-            </a:pPr>
-            <a:r>
-              <a:rPr sz="1220" b="0">
-                <a:solidFill>
-                  <a:srgbClr val="1A1A1A"/>
-                </a:solidFill>
-                <a:latin typeface="Arial"/>
-                <a:ea typeface="微软雅黑"/>
-                <a:cs typeface="Arial"/>
-              </a:rPr>
-              <a:t>三、系统日常运维管理（所有运维操作不能脱离 GMP 体系）</a:t>
-            </a:r>
-          </a:p>
-          <a:p>
-            <a:pPr algn="l">
-              <a:lnSpc>
-                <a:spcPct val="115000"/>
-              </a:lnSpc>
-            </a:pPr>
-            <a:r>
-              <a:rPr sz="1220" b="0">
-                <a:solidFill>
-                  <a:srgbClr val="1A1A1A"/>
-                </a:solidFill>
-                <a:latin typeface="Arial"/>
-                <a:ea typeface="微软雅黑"/>
-                <a:cs typeface="Arial"/>
-              </a:rPr>
-              <a:t>四、备份管理与定期灾难恢复演练</a:t>
-            </a:r>
-          </a:p>
-          <a:p>
-            <a:pPr algn="l">
-              <a:lnSpc>
-                <a:spcPct val="115000"/>
-              </a:lnSpc>
-            </a:pPr>
-            <a:r>
-              <a:rPr sz="1220" b="0">
-                <a:solidFill>
-                  <a:srgbClr val="1A1A1A"/>
-                </a:solidFill>
-                <a:latin typeface="Arial"/>
-                <a:ea typeface="微软雅黑"/>
-                <a:cs typeface="Arial"/>
-              </a:rPr>
-              <a:t>五、电子记录、电子签名日常管控</a:t>
-            </a:r>
-          </a:p>
-          <a:p>
-            <a:pPr algn="l">
-              <a:lnSpc>
-                <a:spcPct val="115000"/>
-              </a:lnSpc>
-            </a:pPr>
-            <a:r>
-              <a:rPr sz="1220" b="0">
-                <a:solidFill>
-                  <a:srgbClr val="1A1A1A"/>
-                </a:solidFill>
-                <a:latin typeface="Arial"/>
-                <a:ea typeface="微软雅黑"/>
-                <a:cs typeface="Arial"/>
-              </a:rPr>
-              <a:t>六、系统异常事件、故障管理（IT 与质量体系打通）</a:t>
-            </a:r>
-          </a:p>
-          <a:p>
-            <a:pPr algn="l">
-              <a:lnSpc>
-                <a:spcPct val="115000"/>
-              </a:lnSpc>
-            </a:pPr>
-            <a:r>
-              <a:rPr sz="1220" b="0">
-                <a:solidFill>
-                  <a:srgbClr val="1A1A1A"/>
-                </a:solidFill>
-                <a:latin typeface="Arial"/>
-                <a:ea typeface="微软雅黑"/>
-                <a:cs typeface="Arial"/>
-              </a:rPr>
-              <a:t>七、变更控制—— 运行阶段所有系统变更必经流程</a:t>
-            </a:r>
-          </a:p>
-          <a:p>
-            <a:pPr algn="l">
-              <a:lnSpc>
-                <a:spcPct val="115000"/>
-              </a:lnSpc>
-            </a:pPr>
-            <a:r>
-              <a:rPr sz="1220" b="0">
-                <a:solidFill>
-                  <a:srgbClr val="1A1A1A"/>
-                </a:solidFill>
-                <a:latin typeface="Arial"/>
-                <a:ea typeface="微软雅黑"/>
-                <a:cs typeface="Arial"/>
-              </a:rPr>
-              <a:t>八、供应商持续管理（外购软件、SaaS 云系统重点）</a:t>
-            </a:r>
-          </a:p>
-          <a:p>
-            <a:pPr algn="l">
-              <a:lnSpc>
-                <a:spcPct val="115000"/>
-              </a:lnSpc>
-            </a:pPr>
-            <a:r>
-              <a:rPr sz="1220" b="0">
-                <a:solidFill>
-                  <a:srgbClr val="1A1A1A"/>
-                </a:solidFill>
-                <a:latin typeface="Arial"/>
-                <a:ea typeface="微软雅黑"/>
-                <a:cs typeface="Arial"/>
-              </a:rPr>
-              <a:t>十、人员持续培训与行为监督</a:t>
-            </a:r>
-          </a:p>
-          <a:p>
-            <a:pPr algn="l">
-              <a:lnSpc>
-                <a:spcPct val="115000"/>
-              </a:lnSpc>
-            </a:pPr>
-            <a:r>
-              <a:rPr sz="1220" b="0">
-                <a:solidFill>
-                  <a:srgbClr val="1A1A1A"/>
-                </a:solidFill>
-                <a:latin typeface="Arial"/>
-                <a:ea typeface="微软雅黑"/>
-                <a:cs typeface="Arial"/>
-              </a:rPr>
-              <a:t>十一、周期性系统合规回顾（System Periodic Review，SPR）</a:t>
-            </a:r>
-          </a:p>
-          <a:p>
-            <a:pPr algn="l">
-              <a:lnSpc>
-                <a:spcPct val="115000"/>
-              </a:lnSpc>
-            </a:pPr>
-            <a:r>
-              <a:rPr sz="1220" b="0">
-                <a:solidFill>
-                  <a:srgbClr val="1A1A1A"/>
-                </a:solidFill>
-                <a:latin typeface="Arial"/>
-                <a:ea typeface="微软雅黑"/>
-                <a:cs typeface="Arial"/>
-              </a:rPr>
-              <a:t>欧美药企标准要求：每 12 个月开展计算机化系统周期性回顾 SPR</a:t>
-            </a:r>
-          </a:p>
-          <a:p>
-            <a:pPr algn="l">
-              <a:lnSpc>
-                <a:spcPct val="115000"/>
-              </a:lnSpc>
-            </a:pPr>
-            <a:r>
-              <a:rPr sz="1220" b="0">
-                <a:solidFill>
-                  <a:srgbClr val="1A1A1A"/>
-                </a:solidFill>
-                <a:latin typeface="Arial"/>
-                <a:ea typeface="微软雅黑"/>
-                <a:cs typeface="Arial"/>
-              </a:rPr>
-              <a:t>十二、文档持续维护</a:t>
+              <a:t>计算机化系统</a:t>
             </a:r>
           </a:p>
         </p:txBody>
       </p:sp>
       <p:cxnSp>
         <p:nvCxnSpPr>
-          <p:cNvPr id="18" name="Connector 17"/>
+          <p:cNvPr id="19" name="Connector 18"/>
           <p:cNvCxnSpPr/>
           <p:nvPr/>
         </p:nvCxnSpPr>
         <p:spPr>
           <a:xfrm>
-            <a:off x="17583955" y="2596902"/>
-            <a:ext cx="0" cy="9875545"/>
+            <a:off x="1207011" y="9367868"/>
+            <a:ext cx="10616210" cy="0"/>
           </a:xfrm>
           <a:prstGeom prst="line">
             <a:avLst/>
@@ -8131,14 +8027,14 @@
       </p:cxnSp>
       <p:sp>
         <p:nvSpPr>
-          <p:cNvPr id="19" name="TextBox 18"/>
+          <p:cNvPr id="20" name="TextBox 19"/>
           <p:cNvSpPr txBox="1"/>
           <p:nvPr/>
         </p:nvSpPr>
         <p:spPr>
           <a:xfrm>
-            <a:off x="17730260" y="2340869"/>
-            <a:ext cx="1426467" cy="1060706"/>
+            <a:off x="1280163" y="9477596"/>
+            <a:ext cx="10506482" cy="3506915"/>
           </a:xfrm>
           <a:prstGeom prst="rect">
             <a:avLst/>
@@ -8146,40 +8042,336 @@
           <a:noFill/>
         </p:spPr>
         <p:txBody>
-          <a:bodyPr wrap="square" lIns="0" rIns="0" tIns="0" bIns="0" anchor="ctr">
+          <a:bodyPr wrap="square" lIns="0" rIns="0" tIns="0" bIns="0" anchor="t">
             <a:spAutoFit/>
           </a:bodyPr>
           <a:lstStyle/>
           <a:p>
             <a:pPr algn="l">
               <a:lnSpc>
-                <a:spcPct val="128000"/>
+                <a:spcPct val="114000"/>
               </a:lnSpc>
             </a:pPr>
             <a:r>
-              <a:rPr sz="4800" b="1" i="0">
-                <a:solidFill>
-                  <a:srgbClr val="132556"/>
+              <a:rPr sz="1760" b="0">
+                <a:solidFill>
+                  <a:srgbClr val="1A1A1A"/>
                 </a:solidFill>
                 <a:latin typeface="Arial"/>
                 <a:ea typeface="微软雅黑"/>
                 <a:cs typeface="Arial"/>
               </a:rPr>
-              <a:t>04</a:t>
-            </a:r>
-          </a:p>
-        </p:txBody>
-      </p:sp>
-      <p:sp>
-        <p:nvSpPr>
-          <p:cNvPr id="20" name="TextBox 19"/>
+              <a:t>一、用户访问与账号权限持续管理</a:t>
+            </a:r>
+          </a:p>
+          <a:p>
+            <a:pPr algn="l">
+              <a:lnSpc>
+                <a:spcPct val="114000"/>
+              </a:lnSpc>
+            </a:pPr>
+            <a:r>
+              <a:rPr sz="1760" b="0">
+                <a:solidFill>
+                  <a:srgbClr val="1A1A1A"/>
+                </a:solidFill>
+                <a:latin typeface="Arial"/>
+                <a:ea typeface="微软雅黑"/>
+                <a:cs typeface="Arial"/>
+              </a:rPr>
+              <a:t>二、审计追踪（Audit Trail）常态化管理（核查高频重点）</a:t>
+            </a:r>
+          </a:p>
+          <a:p>
+            <a:pPr algn="l">
+              <a:lnSpc>
+                <a:spcPct val="114000"/>
+              </a:lnSpc>
+            </a:pPr>
+            <a:r>
+              <a:rPr sz="1760" b="0">
+                <a:solidFill>
+                  <a:srgbClr val="1A1A1A"/>
+                </a:solidFill>
+                <a:latin typeface="Arial"/>
+                <a:ea typeface="微软雅黑"/>
+                <a:cs typeface="Arial"/>
+              </a:rPr>
+              <a:t>三、系统日常运维管理（所有运维操作不能脱离 GMP 体系）</a:t>
+            </a:r>
+          </a:p>
+          <a:p>
+            <a:pPr algn="l">
+              <a:lnSpc>
+                <a:spcPct val="114000"/>
+              </a:lnSpc>
+            </a:pPr>
+            <a:r>
+              <a:rPr sz="1760" b="0">
+                <a:solidFill>
+                  <a:srgbClr val="1A1A1A"/>
+                </a:solidFill>
+                <a:latin typeface="Arial"/>
+                <a:ea typeface="微软雅黑"/>
+                <a:cs typeface="Arial"/>
+              </a:rPr>
+              <a:t>四、备份管理与定期灾难恢复演练</a:t>
+            </a:r>
+          </a:p>
+          <a:p>
+            <a:pPr algn="l">
+              <a:lnSpc>
+                <a:spcPct val="114000"/>
+              </a:lnSpc>
+            </a:pPr>
+            <a:r>
+              <a:rPr sz="1760" b="0">
+                <a:solidFill>
+                  <a:srgbClr val="1A1A1A"/>
+                </a:solidFill>
+                <a:latin typeface="Arial"/>
+                <a:ea typeface="微软雅黑"/>
+                <a:cs typeface="Arial"/>
+              </a:rPr>
+              <a:t>五、电子记录、电子签名日常管控</a:t>
+            </a:r>
+          </a:p>
+          <a:p>
+            <a:pPr algn="l">
+              <a:lnSpc>
+                <a:spcPct val="114000"/>
+              </a:lnSpc>
+            </a:pPr>
+            <a:r>
+              <a:rPr sz="1760" b="0">
+                <a:solidFill>
+                  <a:srgbClr val="1A1A1A"/>
+                </a:solidFill>
+                <a:latin typeface="Arial"/>
+                <a:ea typeface="微软雅黑"/>
+                <a:cs typeface="Arial"/>
+              </a:rPr>
+              <a:t>六、系统异常事件、故障管理（IT 与质量体系打通）</a:t>
+            </a:r>
+          </a:p>
+          <a:p>
+            <a:pPr algn="l">
+              <a:lnSpc>
+                <a:spcPct val="114000"/>
+              </a:lnSpc>
+            </a:pPr>
+            <a:r>
+              <a:rPr sz="1760" b="0">
+                <a:solidFill>
+                  <a:srgbClr val="1A1A1A"/>
+                </a:solidFill>
+                <a:latin typeface="Arial"/>
+                <a:ea typeface="微软雅黑"/>
+                <a:cs typeface="Arial"/>
+              </a:rPr>
+              <a:t>七、变更控制—— 运行阶段所有系统变更必经流程</a:t>
+            </a:r>
+          </a:p>
+          <a:p>
+            <a:pPr algn="l">
+              <a:lnSpc>
+                <a:spcPct val="114000"/>
+              </a:lnSpc>
+            </a:pPr>
+            <a:r>
+              <a:rPr sz="1760" b="0">
+                <a:solidFill>
+                  <a:srgbClr val="1A1A1A"/>
+                </a:solidFill>
+                <a:latin typeface="Arial"/>
+                <a:ea typeface="微软雅黑"/>
+                <a:cs typeface="Arial"/>
+              </a:rPr>
+              <a:t>八、供应商持续管理（外购软件、SaaS 云系统重点）</a:t>
+            </a:r>
+          </a:p>
+          <a:p>
+            <a:pPr algn="l">
+              <a:lnSpc>
+                <a:spcPct val="114000"/>
+              </a:lnSpc>
+            </a:pPr>
+            <a:r>
+              <a:rPr sz="1760" b="0">
+                <a:solidFill>
+                  <a:srgbClr val="1A1A1A"/>
+                </a:solidFill>
+                <a:latin typeface="Arial"/>
+                <a:ea typeface="微软雅黑"/>
+                <a:cs typeface="Arial"/>
+              </a:rPr>
+              <a:t>十、人员持续培训与行为监督</a:t>
+            </a:r>
+          </a:p>
+          <a:p>
+            <a:pPr algn="l">
+              <a:lnSpc>
+                <a:spcPct val="114000"/>
+              </a:lnSpc>
+            </a:pPr>
+            <a:r>
+              <a:rPr sz="1760" b="0">
+                <a:solidFill>
+                  <a:srgbClr val="1A1A1A"/>
+                </a:solidFill>
+                <a:latin typeface="Arial"/>
+                <a:ea typeface="微软雅黑"/>
+                <a:cs typeface="Arial"/>
+              </a:rPr>
+              <a:t>十一、周期性系统合规回顾（System Periodic Review，SPR）</a:t>
+            </a:r>
+          </a:p>
+          <a:p>
+            <a:pPr algn="l">
+              <a:lnSpc>
+                <a:spcPct val="114000"/>
+              </a:lnSpc>
+            </a:pPr>
+            <a:r>
+              <a:rPr sz="1760" b="0">
+                <a:solidFill>
+                  <a:srgbClr val="1A1A1A"/>
+                </a:solidFill>
+                <a:latin typeface="Arial"/>
+                <a:ea typeface="微软雅黑"/>
+                <a:cs typeface="Arial"/>
+              </a:rPr>
+              <a:t>欧美药企标准要求：每 12 个月开展计算机化系统周期性回顾 SPR</a:t>
+            </a:r>
+          </a:p>
+          <a:p>
+            <a:pPr algn="l">
+              <a:lnSpc>
+                <a:spcPct val="114000"/>
+              </a:lnSpc>
+            </a:pPr>
+            <a:r>
+              <a:rPr sz="1760" b="0">
+                <a:solidFill>
+                  <a:srgbClr val="1A1A1A"/>
+                </a:solidFill>
+                <a:latin typeface="Arial"/>
+                <a:ea typeface="微软雅黑"/>
+                <a:cs typeface="Arial"/>
+              </a:rPr>
+              <a:t>十二、文档持续维护</a:t>
+            </a:r>
+          </a:p>
+        </p:txBody>
+      </p:sp>
+      <p:sp>
+        <p:nvSpPr>
+          <p:cNvPr id="21" name="Rounded Rectangle 20"/>
+          <p:cNvSpPr/>
+          <p:nvPr/>
+        </p:nvSpPr>
+        <p:spPr>
+          <a:xfrm>
+            <a:off x="12298710" y="8490042"/>
+            <a:ext cx="11164851" cy="4640774"/>
+          </a:xfrm>
+          <a:prstGeom prst="roundRect">
+            <a:avLst>
+              <a:gd name="adj" fmla="val 4000"/>
+            </a:avLst>
+          </a:prstGeom>
+          <a:solidFill>
+            <a:srgbClr val="F7F9FD"/>
+          </a:solidFill>
+          <a:ln w="25400">
+            <a:solidFill>
+              <a:srgbClr val="C5D0E6"/>
+            </a:solidFill>
+          </a:ln>
+          <a:effectLst>
+            <a:outerShdw blurRad="76200" dist="38100" dir="5400000" rotWithShape="0">
+              <a:srgbClr val="000000">
+                <a:alpha val="18000"/>
+              </a:srgbClr>
+            </a:outerShdw>
+          </a:effectLst>
+        </p:spPr>
+        <p:style>
+          <a:lnRef idx="1">
+            <a:schemeClr val="accent1"/>
+          </a:lnRef>
+          <a:fillRef idx="3">
+            <a:schemeClr val="accent1"/>
+          </a:fillRef>
+          <a:effectRef idx="2">
+            <a:schemeClr val="accent1"/>
+          </a:effectRef>
+          <a:fontRef idx="minor">
+            <a:schemeClr val="lt1"/>
+          </a:fontRef>
+        </p:style>
+        <p:txBody>
+          <a:bodyPr rtlCol="0" anchor="ctr" wrap="square"/>
+          <a:lstStyle/>
+          <a:p>
+            <a:pPr algn="ctr"/>
+          </a:p>
+        </p:txBody>
+      </p:sp>
+      <p:sp>
+        <p:nvSpPr>
+          <p:cNvPr id="22" name="Rectangle 21"/>
+          <p:cNvSpPr/>
+          <p:nvPr/>
+        </p:nvSpPr>
+        <p:spPr>
+          <a:xfrm>
+            <a:off x="12298710" y="8490042"/>
+            <a:ext cx="109728" cy="4640774"/>
+          </a:xfrm>
+          <a:prstGeom prst="rect">
+            <a:avLst/>
+          </a:prstGeom>
+          <a:solidFill>
+            <a:srgbClr val="1D42E1"/>
+          </a:solidFill>
+          <a:ln>
+            <a:noFill/>
+          </a:ln>
+          <a:effectLst/>
+        </p:spPr>
+        <p:style>
+          <a:lnRef idx="1">
+            <a:schemeClr val="accent1"/>
+          </a:lnRef>
+          <a:fillRef idx="3">
+            <a:schemeClr val="accent1"/>
+          </a:fillRef>
+          <a:effectRef idx="2">
+            <a:schemeClr val="accent1"/>
+          </a:effectRef>
+          <a:fontRef idx="minor">
+            <a:schemeClr val="lt1"/>
+          </a:fontRef>
+        </p:style>
+        <p:txBody>
+          <a:bodyPr rtlCol="0" anchor="ctr" wrap="square"/>
+          <a:lstStyle/>
+          <a:p>
+            <a:pPr algn="ctr"/>
+          </a:p>
+        </p:txBody>
+      </p:sp>
+      <p:sp>
+        <p:nvSpPr>
+          <p:cNvPr id="23" name="TextBox 22"/>
           <p:cNvSpPr txBox="1"/>
           <p:nvPr/>
         </p:nvSpPr>
         <p:spPr>
           <a:xfrm>
-            <a:off x="19156727" y="2523750"/>
-            <a:ext cx="3538736" cy="841250"/>
+            <a:off x="12591319" y="8526618"/>
+            <a:ext cx="1499619" cy="804674"/>
           </a:xfrm>
           <a:prstGeom prst="rect">
             <a:avLst/>
@@ -8194,11 +8386,11 @@
           <a:p>
             <a:pPr algn="l">
               <a:lnSpc>
-                <a:spcPct val="112000"/>
+                <a:spcPct val="128000"/>
               </a:lnSpc>
             </a:pPr>
             <a:r>
-              <a:rPr sz="1760" b="1" i="0">
+              <a:rPr sz="4800" b="1" i="0">
                 <a:solidFill>
                   <a:srgbClr val="132556"/>
                 </a:solidFill>
@@ -8206,6 +8398,47 @@
                 <a:ea typeface="微软雅黑"/>
                 <a:cs typeface="Arial"/>
               </a:rPr>
+              <a:t>04</a:t>
+            </a:r>
+          </a:p>
+        </p:txBody>
+      </p:sp>
+      <p:sp>
+        <p:nvSpPr>
+          <p:cNvPr id="24" name="TextBox 23"/>
+          <p:cNvSpPr txBox="1"/>
+          <p:nvPr/>
+        </p:nvSpPr>
+        <p:spPr>
+          <a:xfrm>
+            <a:off x="14036075" y="8599770"/>
+            <a:ext cx="9061726" cy="658369"/>
+          </a:xfrm>
+          <a:prstGeom prst="rect">
+            <a:avLst/>
+          </a:prstGeom>
+          <a:noFill/>
+        </p:spPr>
+        <p:txBody>
+          <a:bodyPr wrap="square" lIns="0" rIns="0" tIns="0" bIns="0" anchor="ctr">
+            <a:spAutoFit/>
+          </a:bodyPr>
+          <a:lstStyle/>
+          <a:p>
+            <a:pPr algn="l">
+              <a:lnSpc>
+                <a:spcPct val="108000"/>
+              </a:lnSpc>
+            </a:pPr>
+            <a:r>
+              <a:rPr sz="2400" b="1" i="0">
+                <a:solidFill>
+                  <a:srgbClr val="132556"/>
+                </a:solidFill>
+                <a:latin typeface="Arial"/>
+                <a:ea typeface="微软雅黑"/>
+                <a:cs typeface="Arial"/>
+              </a:rPr>
               <a:t>库房管理常见合规性问题</a:t>
             </a:r>
           </a:p>
@@ -8213,21 +8446,21 @@
       </p:sp>
       <p:cxnSp>
         <p:nvCxnSpPr>
-          <p:cNvPr id="21" name="Connector 20"/>
+          <p:cNvPr id="25" name="Connector 24"/>
           <p:cNvCxnSpPr/>
           <p:nvPr/>
         </p:nvCxnSpPr>
         <p:spPr>
           <a:xfrm>
-            <a:off x="17876564" y="3438152"/>
-            <a:ext cx="0" cy="9107447"/>
+            <a:off x="12591319" y="9367868"/>
+            <a:ext cx="10616211" cy="0"/>
           </a:xfrm>
           <a:prstGeom prst="line">
             <a:avLst/>
           </a:prstGeom>
-          <a:ln w="34290">
+          <a:ln w="25400">
             <a:solidFill>
-              <a:srgbClr val="1D42E1"/>
+              <a:srgbClr val="C5D0E6"/>
             </a:solidFill>
           </a:ln>
         </p:spPr>
@@ -8248,14 +8481,14 @@
       </p:cxnSp>
       <p:sp>
         <p:nvSpPr>
-          <p:cNvPr id="22" name="TextBox 21"/>
+          <p:cNvPr id="26" name="TextBox 25"/>
           <p:cNvSpPr txBox="1"/>
           <p:nvPr/>
         </p:nvSpPr>
         <p:spPr>
           <a:xfrm>
-            <a:off x="18132597" y="3511304"/>
-            <a:ext cx="4526291" cy="8997718"/>
+            <a:off x="12664471" y="9477596"/>
+            <a:ext cx="10506482" cy="3506915"/>
           </a:xfrm>
           <a:prstGeom prst="rect">
             <a:avLst/>
@@ -8270,11 +8503,11 @@
           <a:p>
             <a:pPr algn="l">
               <a:lnSpc>
-                <a:spcPct val="115000"/>
+                <a:spcPct val="112000"/>
               </a:lnSpc>
             </a:pPr>
             <a:r>
-              <a:rPr sz="1220" b="0">
+              <a:rPr sz="1440" b="0">
                 <a:solidFill>
                   <a:srgbClr val="1A1A1A"/>
                 </a:solidFill>
@@ -8288,11 +8521,11 @@
           <a:p>
             <a:pPr algn="l">
               <a:lnSpc>
-                <a:spcPct val="115000"/>
+                <a:spcPct val="112000"/>
               </a:lnSpc>
             </a:pPr>
             <a:r>
-              <a:rPr sz="1220" b="0">
+              <a:rPr sz="1440" b="0">
                 <a:solidFill>
                   <a:srgbClr val="1A1A1A"/>
                 </a:solidFill>
@@ -8306,11 +8539,11 @@
           <a:p>
             <a:pPr algn="l">
               <a:lnSpc>
-                <a:spcPct val="115000"/>
+                <a:spcPct val="112000"/>
               </a:lnSpc>
             </a:pPr>
             <a:r>
-              <a:rPr sz="1220" b="0">
+              <a:rPr sz="1440" b="0">
                 <a:solidFill>
                   <a:srgbClr val="1A1A1A"/>
                 </a:solidFill>
@@ -8324,11 +8557,11 @@
           <a:p>
             <a:pPr algn="l">
               <a:lnSpc>
-                <a:spcPct val="115000"/>
+                <a:spcPct val="112000"/>
               </a:lnSpc>
             </a:pPr>
             <a:r>
-              <a:rPr sz="1220" b="0">
+              <a:rPr sz="1440" b="0">
                 <a:solidFill>
                   <a:srgbClr val="1A1A1A"/>
                 </a:solidFill>
@@ -8342,11 +8575,11 @@
           <a:p>
             <a:pPr algn="l">
               <a:lnSpc>
-                <a:spcPct val="115000"/>
+                <a:spcPct val="112000"/>
               </a:lnSpc>
             </a:pPr>
             <a:r>
-              <a:rPr sz="1220" b="0">
+              <a:rPr sz="1440" b="0">
                 <a:solidFill>
                   <a:srgbClr val="1A1A1A"/>
                 </a:solidFill>
@@ -8360,11 +8593,11 @@
           <a:p>
             <a:pPr algn="l">
               <a:lnSpc>
-                <a:spcPct val="115000"/>
+                <a:spcPct val="112000"/>
               </a:lnSpc>
             </a:pPr>
             <a:r>
-              <a:rPr sz="1220" b="0">
+              <a:rPr sz="1440" b="0">
                 <a:solidFill>
                   <a:srgbClr val="1A1A1A"/>
                 </a:solidFill>
@@ -8378,11 +8611,11 @@
           <a:p>
             <a:pPr algn="l">
               <a:lnSpc>
-                <a:spcPct val="115000"/>
+                <a:spcPct val="112000"/>
               </a:lnSpc>
             </a:pPr>
             <a:r>
-              <a:rPr sz="1220" b="0">
+              <a:rPr sz="1440" b="0">
                 <a:solidFill>
                   <a:srgbClr val="1A1A1A"/>
                 </a:solidFill>
@@ -8396,11 +8629,11 @@
           <a:p>
             <a:pPr algn="l">
               <a:lnSpc>
-                <a:spcPct val="115000"/>
+                <a:spcPct val="112000"/>
               </a:lnSpc>
             </a:pPr>
             <a:r>
-              <a:rPr sz="1220" b="0">
+              <a:rPr sz="1440" b="0">
                 <a:solidFill>
                   <a:srgbClr val="1A1A1A"/>
                 </a:solidFill>
@@ -8414,11 +8647,11 @@
           <a:p>
             <a:pPr algn="l">
               <a:lnSpc>
-                <a:spcPct val="115000"/>
+                <a:spcPct val="112000"/>
               </a:lnSpc>
             </a:pPr>
             <a:r>
-              <a:rPr sz="1220" b="0">
+              <a:rPr sz="1440" b="0">
                 <a:solidFill>
                   <a:srgbClr val="1A1A1A"/>
                 </a:solidFill>
@@ -8432,11 +8665,11 @@
           <a:p>
             <a:pPr algn="l">
               <a:lnSpc>
-                <a:spcPct val="115000"/>
+                <a:spcPct val="112000"/>
               </a:lnSpc>
             </a:pPr>
             <a:r>
-              <a:rPr sz="1220" b="0">
+              <a:rPr sz="1440" b="0">
                 <a:solidFill>
                   <a:srgbClr val="1A1A1A"/>
                 </a:solidFill>
@@ -8450,14 +8683,14 @@
           <a:p>
             <a:pPr algn="l">
               <a:lnSpc>
-                <a:spcPct val="115000"/>
+                <a:spcPct val="112000"/>
               </a:lnSpc>
               <a:spcBef>
-                <a:spcPts val="1000"/>
+                <a:spcPts val="400"/>
               </a:spcBef>
             </a:pPr>
             <a:r>
-              <a:rPr sz="1220" b="1">
+              <a:rPr sz="1440" b="1">
                 <a:solidFill>
                   <a:srgbClr val="FF0000"/>
                 </a:solidFill>
@@ -8469,15 +8702,15 @@
             </a:r>
           </a:p>
           <a:p>
-            <a:pPr algn="l" marL="114300" indent="-114300">
+            <a:pPr algn="l" marL="292608" indent="-292608">
               <a:lnSpc>
-                <a:spcPct val="115000"/>
+                <a:spcPct val="112000"/>
               </a:lnSpc>
               <a:buFont typeface="Arial"/>
               <a:buChar char="●"/>
             </a:pPr>
             <a:r>
-              <a:rPr sz="1220" b="0">
+              <a:rPr sz="1440" b="0">
                 <a:solidFill>
                   <a:srgbClr val="1A1A1A"/>
                 </a:solidFill>
@@ -8489,15 +8722,15 @@
             </a:r>
           </a:p>
           <a:p>
-            <a:pPr algn="l" marL="114300" indent="-114300">
+            <a:pPr algn="l" marL="292608" indent="-292608">
               <a:lnSpc>
-                <a:spcPct val="115000"/>
+                <a:spcPct val="112000"/>
               </a:lnSpc>
               <a:buFont typeface="Arial"/>
               <a:buChar char="●"/>
             </a:pPr>
             <a:r>
-              <a:rPr sz="1220" b="0">
+              <a:rPr sz="1440" b="0">
                 <a:solidFill>
                   <a:srgbClr val="1A1A1A"/>
                 </a:solidFill>
@@ -8509,15 +8742,15 @@
             </a:r>
           </a:p>
           <a:p>
-            <a:pPr algn="l" marL="114300" indent="-114300">
+            <a:pPr algn="l" marL="292608" indent="-292608">
               <a:lnSpc>
-                <a:spcPct val="115000"/>
+                <a:spcPct val="112000"/>
               </a:lnSpc>
               <a:buFont typeface="Arial"/>
               <a:buChar char="●"/>
             </a:pPr>
             <a:r>
-              <a:rPr sz="1220" b="0">
+              <a:rPr sz="1440" b="0">
                 <a:solidFill>
                   <a:srgbClr val="1A1A1A"/>
                 </a:solidFill>
@@ -8529,15 +8762,15 @@
             </a:r>
           </a:p>
           <a:p>
-            <a:pPr algn="l" marL="114300" indent="-114300">
+            <a:pPr algn="l" marL="292608" indent="-292608">
               <a:lnSpc>
-                <a:spcPct val="115000"/>
+                <a:spcPct val="112000"/>
               </a:lnSpc>
               <a:buFont typeface="Arial"/>
               <a:buChar char="●"/>
             </a:pPr>
             <a:r>
-              <a:rPr sz="1220" b="0">
+              <a:rPr sz="1440" b="0">
                 <a:solidFill>
                   <a:srgbClr val="1A1A1A"/>
                 </a:solidFill>
@@ -8549,15 +8782,15 @@
             </a:r>
           </a:p>
           <a:p>
-            <a:pPr algn="l" marL="114300" indent="-114300">
+            <a:pPr algn="l" marL="292608" indent="-292608">
               <a:lnSpc>
-                <a:spcPct val="115000"/>
+                <a:spcPct val="112000"/>
               </a:lnSpc>
               <a:buFont typeface="Arial"/>
               <a:buChar char="●"/>
             </a:pPr>
             <a:r>
-              <a:rPr sz="1220" b="0">
+              <a:rPr sz="1440" b="0">
                 <a:solidFill>
                   <a:srgbClr val="1A1A1A"/>
                 </a:solidFill>
@@ -8569,15 +8802,15 @@
             </a:r>
           </a:p>
           <a:p>
-            <a:pPr algn="l" marL="114300" indent="-114300">
+            <a:pPr algn="l" marL="292608" indent="-292608">
               <a:lnSpc>
-                <a:spcPct val="115000"/>
+                <a:spcPct val="112000"/>
               </a:lnSpc>
               <a:buFont typeface="Arial"/>
               <a:buChar char="●"/>
             </a:pPr>
             <a:r>
-              <a:rPr sz="1220" b="0">
+              <a:rPr sz="1440" b="0">
                 <a:solidFill>
                   <a:srgbClr val="1A1A1A"/>
                 </a:solidFill>

--- a/GMP合规管理/工厂GMP合规管理.pptx
+++ b/GMP合规管理/工厂GMP合规管理.pptx
@@ -6637,8 +6637,8 @@
         </p:nvSpPr>
         <p:spPr>
           <a:xfrm>
-            <a:off x="11338588" y="146304"/>
-            <a:ext cx="11887229" cy="1316739"/>
+            <a:off x="10972827" y="438913"/>
+            <a:ext cx="11923805" cy="987554"/>
           </a:xfrm>
           <a:prstGeom prst="rect">
             <a:avLst/>
@@ -6678,26 +6678,26 @@
         </p:nvSpPr>
         <p:spPr>
           <a:xfrm>
-            <a:off x="914402" y="1645924"/>
-            <a:ext cx="11164851" cy="6661237"/>
+            <a:off x="950978" y="1645924"/>
+            <a:ext cx="22494296" cy="11228860"/>
           </a:xfrm>
           <a:prstGeom prst="roundRect">
             <a:avLst>
-              <a:gd name="adj" fmla="val 4000"/>
+              <a:gd name="adj" fmla="val 3000"/>
             </a:avLst>
           </a:prstGeom>
           <a:solidFill>
-            <a:srgbClr val="F7F9FD"/>
+            <a:srgbClr val="FFFFFF"/>
           </a:solidFill>
-          <a:ln w="25400">
+          <a:ln w="38100">
             <a:solidFill>
-              <a:srgbClr val="C5D0E6"/>
+              <a:srgbClr val="1D42E1"/>
             </a:solidFill>
           </a:ln>
           <a:effectLst>
-            <a:outerShdw blurRad="76200" dist="38100" dir="5400000" rotWithShape="0">
+            <a:outerShdw blurRad="127000" dist="63500" dir="5400000" rotWithShape="0">
               <a:srgbClr val="000000">
-                <a:alpha val="18000"/>
+                <a:alpha val="22000"/>
               </a:srgbClr>
             </a:outerShdw>
           </a:effectLst>
@@ -6732,8 +6732,8 @@
         </p:nvSpPr>
         <p:spPr>
           <a:xfrm>
-            <a:off x="914402" y="1645924"/>
-            <a:ext cx="109728" cy="6661237"/>
+            <a:off x="987554" y="1682500"/>
+            <a:ext cx="22421144" cy="91440"/>
           </a:xfrm>
           <a:prstGeom prst="rect">
             <a:avLst/>
@@ -6776,8 +6776,8 @@
         </p:nvSpPr>
         <p:spPr>
           <a:xfrm>
-            <a:off x="1207011" y="1682500"/>
-            <a:ext cx="1499619" cy="804674"/>
+            <a:off x="1389891" y="2011685"/>
+            <a:ext cx="1572771" cy="841250"/>
           </a:xfrm>
           <a:prstGeom prst="rect">
             <a:avLst/>
@@ -6796,7 +6796,7 @@
               </a:lnSpc>
             </a:pPr>
             <a:r>
-              <a:rPr sz="4800" b="1" i="0">
+              <a:rPr sz="5200" b="1" i="0">
                 <a:solidFill>
                   <a:srgbClr val="132556"/>
                 </a:solidFill>
@@ -6817,8 +6817,8 @@
         </p:nvSpPr>
         <p:spPr>
           <a:xfrm>
-            <a:off x="2651766" y="1755652"/>
-            <a:ext cx="9061726" cy="658369"/>
+            <a:off x="3145543" y="2011685"/>
+            <a:ext cx="4576042" cy="841250"/>
           </a:xfrm>
           <a:prstGeom prst="rect">
             <a:avLst/>
@@ -6837,7 +6837,7 @@
               </a:lnSpc>
             </a:pPr>
             <a:r>
-              <a:rPr sz="2400" b="1" i="0">
+              <a:rPr sz="1900" b="1" i="0">
                 <a:solidFill>
                   <a:srgbClr val="132556"/>
                 </a:solidFill>
@@ -6858,8 +6858,547 @@
         </p:nvCxnSpPr>
         <p:spPr>
           <a:xfrm>
-            <a:off x="1207011" y="2523750"/>
-            <a:ext cx="10616210" cy="0"/>
+            <a:off x="1389891" y="2926087"/>
+            <a:ext cx="6331695" cy="0"/>
+          </a:xfrm>
+          <a:prstGeom prst="line">
+            <a:avLst/>
+          </a:prstGeom>
+          <a:ln w="31750">
+            <a:solidFill>
+              <a:srgbClr val="C5D0E6"/>
+            </a:solidFill>
+          </a:ln>
+        </p:spPr>
+        <p:style>
+          <a:lnRef idx="2">
+            <a:schemeClr val="accent1"/>
+          </a:lnRef>
+          <a:fillRef idx="0">
+            <a:schemeClr val="accent1"/>
+          </a:fillRef>
+          <a:effectRef idx="1">
+            <a:schemeClr val="accent1"/>
+          </a:effectRef>
+          <a:fontRef idx="minor">
+            <a:schemeClr val="tx1"/>
+          </a:fontRef>
+        </p:style>
+      </p:cxnSp>
+      <p:sp>
+        <p:nvSpPr>
+          <p:cNvPr id="8" name="TextBox 7"/>
+          <p:cNvSpPr txBox="1"/>
+          <p:nvPr/>
+        </p:nvSpPr>
+        <p:spPr>
+          <a:xfrm>
+            <a:off x="1499619" y="3145543"/>
+            <a:ext cx="6221966" cy="9144022"/>
+          </a:xfrm>
+          <a:prstGeom prst="rect">
+            <a:avLst/>
+          </a:prstGeom>
+          <a:noFill/>
+        </p:spPr>
+        <p:txBody>
+          <a:bodyPr wrap="square" lIns="0" rIns="0" tIns="0" bIns="0" anchor="t">
+            <a:spAutoFit/>
+          </a:bodyPr>
+          <a:lstStyle/>
+          <a:p>
+            <a:pPr algn="l">
+              <a:lnSpc>
+                <a:spcPct val="120000"/>
+              </a:lnSpc>
+            </a:pPr>
+            <a:r>
+              <a:rPr sz="1860" b="0">
+                <a:solidFill>
+                  <a:srgbClr val="1A1A1A"/>
+                </a:solidFill>
+                <a:latin typeface="Arial"/>
+                <a:ea typeface="微软雅黑"/>
+                <a:cs typeface="Arial"/>
+              </a:rPr>
+              <a:t>一、人员管理类高频合规性问题：着装，培训，外来人员管理，复核，隐瞒不报</a:t>
+            </a:r>
+          </a:p>
+          <a:p>
+            <a:pPr algn="l">
+              <a:lnSpc>
+                <a:spcPct val="120000"/>
+              </a:lnSpc>
+              <a:spcBef>
+                <a:spcPts val="37"/>
+              </a:spcBef>
+            </a:pPr>
+            <a:r>
+              <a:rPr sz="1860" b="0">
+                <a:solidFill>
+                  <a:srgbClr val="1A1A1A"/>
+                </a:solidFill>
+                <a:latin typeface="Arial"/>
+                <a:ea typeface="微软雅黑"/>
+                <a:cs typeface="Arial"/>
+              </a:rPr>
+              <a:t>二、物料、中间产品管理类（混淆、交叉污染）</a:t>
+            </a:r>
+          </a:p>
+          <a:p>
+            <a:pPr algn="l">
+              <a:lnSpc>
+                <a:spcPct val="120000"/>
+              </a:lnSpc>
+              <a:spcBef>
+                <a:spcPts val="37"/>
+              </a:spcBef>
+            </a:pPr>
+            <a:r>
+              <a:rPr sz="1860" b="0">
+                <a:solidFill>
+                  <a:srgbClr val="1A1A1A"/>
+                </a:solidFill>
+                <a:latin typeface="Arial"/>
+                <a:ea typeface="微软雅黑"/>
+                <a:cs typeface="Arial"/>
+              </a:rPr>
+              <a:t>三、工艺操作合规问题</a:t>
+            </a:r>
+          </a:p>
+          <a:p>
+            <a:pPr algn="l">
+              <a:lnSpc>
+                <a:spcPct val="120000"/>
+              </a:lnSpc>
+              <a:spcBef>
+                <a:spcPts val="37"/>
+              </a:spcBef>
+            </a:pPr>
+            <a:r>
+              <a:rPr sz="1860" b="0">
+                <a:solidFill>
+                  <a:srgbClr val="1A1A1A"/>
+                </a:solidFill>
+                <a:latin typeface="Arial"/>
+                <a:ea typeface="微软雅黑"/>
+                <a:cs typeface="Arial"/>
+              </a:rPr>
+              <a:t>四、设备、设施相关问题（衔接设备安全巡检）：状态，标识，清洁，跑冒滴漏，交叉污染；</a:t>
+            </a:r>
+          </a:p>
+          <a:p>
+            <a:pPr algn="l">
+              <a:lnSpc>
+                <a:spcPct val="120000"/>
+              </a:lnSpc>
+              <a:spcBef>
+                <a:spcPts val="37"/>
+              </a:spcBef>
+            </a:pPr>
+            <a:r>
+              <a:rPr sz="1860" b="0">
+                <a:solidFill>
+                  <a:srgbClr val="1A1A1A"/>
+                </a:solidFill>
+                <a:latin typeface="Arial"/>
+                <a:ea typeface="微软雅黑"/>
+                <a:cs typeface="Arial"/>
+              </a:rPr>
+              <a:t>五、洁净区环境与公用系统（无菌车间重灾区）</a:t>
+            </a:r>
+          </a:p>
+          <a:p>
+            <a:pPr algn="l">
+              <a:lnSpc>
+                <a:spcPct val="120000"/>
+              </a:lnSpc>
+              <a:spcBef>
+                <a:spcPts val="37"/>
+              </a:spcBef>
+            </a:pPr>
+            <a:r>
+              <a:rPr sz="1860" b="0">
+                <a:solidFill>
+                  <a:srgbClr val="1A1A1A"/>
+                </a:solidFill>
+                <a:latin typeface="Arial"/>
+                <a:ea typeface="微软雅黑"/>
+                <a:cs typeface="Arial"/>
+              </a:rPr>
+              <a:t>六、记录与文件缺陷（飞检第一关注重点）</a:t>
+            </a:r>
+          </a:p>
+          <a:p>
+            <a:pPr algn="l">
+              <a:lnSpc>
+                <a:spcPct val="120000"/>
+              </a:lnSpc>
+              <a:spcBef>
+                <a:spcPts val="37"/>
+              </a:spcBef>
+            </a:pPr>
+            <a:r>
+              <a:rPr sz="1860" b="0">
+                <a:solidFill>
+                  <a:srgbClr val="1A1A1A"/>
+                </a:solidFill>
+                <a:latin typeface="Arial"/>
+                <a:ea typeface="微软雅黑"/>
+                <a:cs typeface="Arial"/>
+              </a:rPr>
+              <a:t>七、计算机化系统 &amp; 数据完整性问题</a:t>
+            </a:r>
+          </a:p>
+          <a:p>
+            <a:pPr algn="l">
+              <a:lnSpc>
+                <a:spcPct val="120000"/>
+              </a:lnSpc>
+              <a:spcBef>
+                <a:spcPts val="37"/>
+              </a:spcBef>
+            </a:pPr>
+            <a:r>
+              <a:rPr sz="1860" b="0">
+                <a:solidFill>
+                  <a:srgbClr val="1A1A1A"/>
+                </a:solidFill>
+                <a:latin typeface="Arial"/>
+                <a:ea typeface="微软雅黑"/>
+                <a:cs typeface="Arial"/>
+              </a:rPr>
+              <a:t>八、质量体系工具落地问题（偏差、变更、CAPA、OOS瞒报，调查不充分）</a:t>
+            </a:r>
+          </a:p>
+          <a:p>
+            <a:pPr algn="l">
+              <a:lnSpc>
+                <a:spcPct val="120000"/>
+              </a:lnSpc>
+              <a:spcBef>
+                <a:spcPts val="37"/>
+              </a:spcBef>
+            </a:pPr>
+            <a:r>
+              <a:rPr sz="1860" b="0">
+                <a:solidFill>
+                  <a:srgbClr val="1A1A1A"/>
+                </a:solidFill>
+                <a:latin typeface="Arial"/>
+                <a:ea typeface="微软雅黑"/>
+                <a:cs typeface="Arial"/>
+              </a:rPr>
+              <a:t>九、现场 EHS 合规问题（GMP + 安全生产双重要求）</a:t>
+            </a:r>
+          </a:p>
+          <a:p>
+            <a:pPr algn="l">
+              <a:lnSpc>
+                <a:spcPct val="120000"/>
+              </a:lnSpc>
+              <a:spcBef>
+                <a:spcPts val="1437"/>
+              </a:spcBef>
+            </a:pPr>
+            <a:r>
+              <a:rPr sz="1860" b="1">
+                <a:solidFill>
+                  <a:srgbClr val="D40000"/>
+                </a:solidFill>
+                <a:latin typeface="Arial"/>
+                <a:ea typeface="微软雅黑"/>
+                <a:cs typeface="Arial"/>
+              </a:rPr>
+              <a:t>重大高风险缺陷（极易导致官方警告、停产）</a:t>
+            </a:r>
+          </a:p>
+          <a:p>
+            <a:pPr algn="l" marL="292608" indent="-292608">
+              <a:lnSpc>
+                <a:spcPct val="120000"/>
+              </a:lnSpc>
+              <a:spcBef>
+                <a:spcPts val="37"/>
+              </a:spcBef>
+              <a:buFont typeface="Arial"/>
+              <a:buChar char="●"/>
+            </a:pPr>
+            <a:r>
+              <a:rPr sz="1860" b="0">
+                <a:solidFill>
+                  <a:srgbClr val="1A1A1A"/>
+                </a:solidFill>
+                <a:latin typeface="Arial"/>
+                <a:ea typeface="微软雅黑"/>
+                <a:cs typeface="Arial"/>
+              </a:rPr>
+              <a:t>伪造、篡改生产 / 检验原始数据；共享账号规避系统管控</a:t>
+            </a:r>
+          </a:p>
+          <a:p>
+            <a:pPr algn="l" marL="292608" indent="-292608">
+              <a:lnSpc>
+                <a:spcPct val="120000"/>
+              </a:lnSpc>
+              <a:spcBef>
+                <a:spcPts val="37"/>
+              </a:spcBef>
+              <a:buFont typeface="Arial"/>
+              <a:buChar char="●"/>
+            </a:pPr>
+            <a:r>
+              <a:rPr sz="1860" b="0">
+                <a:solidFill>
+                  <a:srgbClr val="1A1A1A"/>
+                </a:solidFill>
+                <a:latin typeface="Arial"/>
+                <a:ea typeface="微软雅黑"/>
+                <a:cs typeface="Arial"/>
+              </a:rPr>
+              <a:t>未经 QA 放行物料投入生产</a:t>
+            </a:r>
+          </a:p>
+          <a:p>
+            <a:pPr algn="l" marL="292608" indent="-292608">
+              <a:lnSpc>
+                <a:spcPct val="120000"/>
+              </a:lnSpc>
+              <a:spcBef>
+                <a:spcPts val="37"/>
+              </a:spcBef>
+              <a:buFont typeface="Arial"/>
+              <a:buChar char="●"/>
+            </a:pPr>
+            <a:r>
+              <a:rPr sz="1860" b="0">
+                <a:solidFill>
+                  <a:srgbClr val="1A1A1A"/>
+                </a:solidFill>
+                <a:latin typeface="Arial"/>
+                <a:ea typeface="微软雅黑"/>
+                <a:cs typeface="Arial"/>
+              </a:rPr>
+              <a:t>隐瞒重大异常，不报偏差，继续生产产品</a:t>
+            </a:r>
+          </a:p>
+          <a:p>
+            <a:pPr algn="l" marL="292608" indent="-292608">
+              <a:lnSpc>
+                <a:spcPct val="120000"/>
+              </a:lnSpc>
+              <a:spcBef>
+                <a:spcPts val="37"/>
+              </a:spcBef>
+              <a:buFont typeface="Arial"/>
+              <a:buChar char="●"/>
+            </a:pPr>
+            <a:r>
+              <a:rPr sz="1860" b="0">
+                <a:solidFill>
+                  <a:srgbClr val="1A1A1A"/>
+                </a:solidFill>
+                <a:latin typeface="Arial"/>
+                <a:ea typeface="微软雅黑"/>
+                <a:cs typeface="Arial"/>
+              </a:rPr>
+              <a:t>拆除、屏蔽设备安全、工艺联锁装置</a:t>
+            </a:r>
+          </a:p>
+          <a:p>
+            <a:pPr algn="l" marL="292608" indent="-292608">
+              <a:lnSpc>
+                <a:spcPct val="120000"/>
+              </a:lnSpc>
+              <a:spcBef>
+                <a:spcPts val="37"/>
+              </a:spcBef>
+              <a:buFont typeface="Arial"/>
+              <a:buChar char="●"/>
+            </a:pPr>
+            <a:r>
+              <a:rPr sz="1860" b="0">
+                <a:solidFill>
+                  <a:srgbClr val="1A1A1A"/>
+                </a:solidFill>
+                <a:latin typeface="Arial"/>
+                <a:ea typeface="微软雅黑"/>
+                <a:cs typeface="Arial"/>
+              </a:rPr>
+              <a:t>跨品种生产未有效清场，存在严重交叉污染风险</a:t>
+            </a:r>
+          </a:p>
+          <a:p>
+            <a:pPr algn="l">
+              <a:lnSpc>
+                <a:spcPct val="120000"/>
+              </a:lnSpc>
+              <a:spcBef>
+                <a:spcPts val="1437"/>
+              </a:spcBef>
+            </a:pPr>
+            <a:r>
+              <a:rPr sz="1860" b="1">
+                <a:solidFill>
+                  <a:srgbClr val="1A1A1A"/>
+                </a:solidFill>
+                <a:latin typeface="Arial"/>
+                <a:ea typeface="微软雅黑"/>
+                <a:cs typeface="Arial"/>
+              </a:rPr>
+              <a:t>主要一般缺陷（日常巡检最常见）</a:t>
+            </a:r>
+          </a:p>
+          <a:p>
+            <a:pPr algn="l" marL="292608" indent="-292608">
+              <a:lnSpc>
+                <a:spcPct val="120000"/>
+              </a:lnSpc>
+              <a:spcBef>
+                <a:spcPts val="37"/>
+              </a:spcBef>
+              <a:buFont typeface="Arial"/>
+              <a:buChar char="●"/>
+            </a:pPr>
+            <a:r>
+              <a:rPr sz="1860" b="0">
+                <a:solidFill>
+                  <a:srgbClr val="1A1A1A"/>
+                </a:solidFill>
+                <a:latin typeface="Arial"/>
+                <a:ea typeface="微软雅黑"/>
+                <a:cs typeface="Arial"/>
+              </a:rPr>
+              <a:t>记录填写不及时、信息不全；记录修改不规范</a:t>
+            </a:r>
+          </a:p>
+          <a:p>
+            <a:pPr algn="l" marL="292608" indent="-292608">
+              <a:lnSpc>
+                <a:spcPct val="120000"/>
+              </a:lnSpc>
+              <a:spcBef>
+                <a:spcPts val="37"/>
+              </a:spcBef>
+              <a:buFont typeface="Arial"/>
+              <a:buChar char="●"/>
+            </a:pPr>
+            <a:r>
+              <a:rPr sz="1860" b="0">
+                <a:solidFill>
+                  <a:srgbClr val="1A1A1A"/>
+                </a:solidFill>
+                <a:latin typeface="Arial"/>
+                <a:ea typeface="微软雅黑"/>
+                <a:cs typeface="Arial"/>
+              </a:rPr>
+              <a:t>物料标识不清、容器敞口存放</a:t>
+            </a:r>
+          </a:p>
+          <a:p>
+            <a:pPr algn="l" marL="292608" indent="-292608">
+              <a:lnSpc>
+                <a:spcPct val="120000"/>
+              </a:lnSpc>
+              <a:spcBef>
+                <a:spcPts val="37"/>
+              </a:spcBef>
+              <a:buFont typeface="Arial"/>
+              <a:buChar char="●"/>
+            </a:pPr>
+            <a:r>
+              <a:rPr sz="1860" b="0">
+                <a:solidFill>
+                  <a:srgbClr val="1A1A1A"/>
+                </a:solidFill>
+                <a:latin typeface="Arial"/>
+                <a:ea typeface="微软雅黑"/>
+                <a:cs typeface="Arial"/>
+              </a:rPr>
+              <a:t>洁净区人员行为违规、更衣不规范</a:t>
+            </a:r>
+          </a:p>
+          <a:p>
+            <a:pPr algn="l" marL="292608" indent="-292608">
+              <a:lnSpc>
+                <a:spcPct val="120000"/>
+              </a:lnSpc>
+              <a:spcBef>
+                <a:spcPts val="37"/>
+              </a:spcBef>
+              <a:buFont typeface="Arial"/>
+              <a:buChar char="●"/>
+            </a:pPr>
+            <a:r>
+              <a:rPr sz="1860" b="0">
+                <a:solidFill>
+                  <a:srgbClr val="1A1A1A"/>
+                </a:solidFill>
+                <a:latin typeface="Arial"/>
+                <a:ea typeface="微软雅黑"/>
+                <a:cs typeface="Arial"/>
+              </a:rPr>
+              <a:t>环境监测超标未调查；消毒管理不规范</a:t>
+            </a:r>
+          </a:p>
+          <a:p>
+            <a:pPr algn="l" marL="292608" indent="-292608">
+              <a:lnSpc>
+                <a:spcPct val="120000"/>
+              </a:lnSpc>
+              <a:spcBef>
+                <a:spcPts val="37"/>
+              </a:spcBef>
+              <a:buFont typeface="Arial"/>
+              <a:buChar char="●"/>
+            </a:pPr>
+            <a:r>
+              <a:rPr sz="1860" b="0">
+                <a:solidFill>
+                  <a:srgbClr val="1A1A1A"/>
+                </a:solidFill>
+                <a:latin typeface="Arial"/>
+                <a:ea typeface="微软雅黑"/>
+                <a:cs typeface="Arial"/>
+              </a:rPr>
+              <a:t>维保、巡检记录漏记；计量器具临近 / 超校准周期</a:t>
+            </a:r>
+          </a:p>
+          <a:p>
+            <a:pPr algn="l" marL="292608" indent="-292608">
+              <a:lnSpc>
+                <a:spcPct val="120000"/>
+              </a:lnSpc>
+              <a:spcBef>
+                <a:spcPts val="37"/>
+              </a:spcBef>
+              <a:buFont typeface="Arial"/>
+              <a:buChar char="●"/>
+            </a:pPr>
+            <a:r>
+              <a:rPr sz="1860" b="0">
+                <a:solidFill>
+                  <a:srgbClr val="1A1A1A"/>
+                </a:solidFill>
+                <a:latin typeface="Arial"/>
+                <a:ea typeface="微软雅黑"/>
+                <a:cs typeface="Arial"/>
+              </a:rPr>
+              <a:t>审计追踪仅开启，未实施周期性审核</a:t>
+            </a:r>
+          </a:p>
+        </p:txBody>
+      </p:sp>
+      <p:cxnSp>
+        <p:nvCxnSpPr>
+          <p:cNvPr id="9" name="Connector 8"/>
+          <p:cNvCxnSpPr/>
+          <p:nvPr/>
+        </p:nvCxnSpPr>
+        <p:spPr>
+          <a:xfrm>
+            <a:off x="7941042" y="2121413"/>
+            <a:ext cx="0" cy="10277881"/>
           </a:xfrm>
           <a:prstGeom prst="line">
             <a:avLst/>
@@ -6887,14 +7426,14 @@
       </p:cxnSp>
       <p:sp>
         <p:nvSpPr>
-          <p:cNvPr id="8" name="TextBox 7"/>
+          <p:cNvPr id="10" name="TextBox 9"/>
           <p:cNvSpPr txBox="1"/>
           <p:nvPr/>
         </p:nvSpPr>
         <p:spPr>
           <a:xfrm>
-            <a:off x="1280163" y="2633478"/>
-            <a:ext cx="10506482" cy="5527378"/>
+            <a:off x="8160499" y="2011685"/>
+            <a:ext cx="1572771" cy="841250"/>
           </a:xfrm>
           <a:prstGeom prst="rect">
             <a:avLst/>
@@ -6902,531 +7441,27 @@
           <a:noFill/>
         </p:spPr>
         <p:txBody>
-          <a:bodyPr wrap="square" lIns="0" rIns="0" tIns="0" bIns="0" anchor="t">
+          <a:bodyPr wrap="square" lIns="0" rIns="0" tIns="0" bIns="0" anchor="ctr">
             <a:spAutoFit/>
           </a:bodyPr>
           <a:lstStyle/>
           <a:p>
             <a:pPr algn="l">
               <a:lnSpc>
-                <a:spcPct val="114000"/>
+                <a:spcPct val="128000"/>
               </a:lnSpc>
             </a:pPr>
             <a:r>
-              <a:rPr sz="1540" b="0">
-                <a:solidFill>
-                  <a:srgbClr val="1A1A1A"/>
+              <a:rPr sz="5200" b="1" i="0">
+                <a:solidFill>
+                  <a:srgbClr val="132556"/>
                 </a:solidFill>
                 <a:latin typeface="Arial"/>
                 <a:ea typeface="微软雅黑"/>
                 <a:cs typeface="Arial"/>
               </a:rPr>
-              <a:t>一、人员管理类高频合规性问题：着装，培训，外来人员管理，复核，隐瞒不报</a:t>
-            </a:r>
-          </a:p>
-          <a:p>
-            <a:pPr algn="l">
-              <a:lnSpc>
-                <a:spcPct val="114000"/>
-              </a:lnSpc>
-            </a:pPr>
-            <a:r>
-              <a:rPr sz="1540" b="0">
-                <a:solidFill>
-                  <a:srgbClr val="1A1A1A"/>
-                </a:solidFill>
-                <a:latin typeface="Arial"/>
-                <a:ea typeface="微软雅黑"/>
-                <a:cs typeface="Arial"/>
-              </a:rPr>
-              <a:t>二、物料、中间产品管理类（混淆、交叉污染）</a:t>
-            </a:r>
-          </a:p>
-          <a:p>
-            <a:pPr algn="l">
-              <a:lnSpc>
-                <a:spcPct val="114000"/>
-              </a:lnSpc>
-            </a:pPr>
-            <a:r>
-              <a:rPr sz="1540" b="0">
-                <a:solidFill>
-                  <a:srgbClr val="1A1A1A"/>
-                </a:solidFill>
-                <a:latin typeface="Arial"/>
-                <a:ea typeface="微软雅黑"/>
-                <a:cs typeface="Arial"/>
-              </a:rPr>
-              <a:t>三、工艺操作合规问题</a:t>
-            </a:r>
-          </a:p>
-          <a:p>
-            <a:pPr algn="l">
-              <a:lnSpc>
-                <a:spcPct val="114000"/>
-              </a:lnSpc>
-            </a:pPr>
-            <a:r>
-              <a:rPr sz="1540" b="0">
-                <a:solidFill>
-                  <a:srgbClr val="1A1A1A"/>
-                </a:solidFill>
-                <a:latin typeface="Arial"/>
-                <a:ea typeface="微软雅黑"/>
-                <a:cs typeface="Arial"/>
-              </a:rPr>
-              <a:t>四、设备、设施相关问题（衔接设备安全巡检）：状态，标识，清洁，跑冒滴漏，交叉污染；</a:t>
-            </a:r>
-          </a:p>
-          <a:p>
-            <a:pPr algn="l">
-              <a:lnSpc>
-                <a:spcPct val="114000"/>
-              </a:lnSpc>
-            </a:pPr>
-            <a:r>
-              <a:rPr sz="1540" b="0">
-                <a:solidFill>
-                  <a:srgbClr val="1A1A1A"/>
-                </a:solidFill>
-                <a:latin typeface="Arial"/>
-                <a:ea typeface="微软雅黑"/>
-                <a:cs typeface="Arial"/>
-              </a:rPr>
-              <a:t>五、洁净区环境与公用系统（无菌车间重灾区）</a:t>
-            </a:r>
-          </a:p>
-          <a:p>
-            <a:pPr algn="l">
-              <a:lnSpc>
-                <a:spcPct val="114000"/>
-              </a:lnSpc>
-            </a:pPr>
-            <a:r>
-              <a:rPr sz="1540" b="0">
-                <a:solidFill>
-                  <a:srgbClr val="1A1A1A"/>
-                </a:solidFill>
-                <a:latin typeface="Arial"/>
-                <a:ea typeface="微软雅黑"/>
-                <a:cs typeface="Arial"/>
-              </a:rPr>
-              <a:t>六、记录与文件缺陷（飞检第一关注重点）</a:t>
-            </a:r>
-          </a:p>
-          <a:p>
-            <a:pPr algn="l">
-              <a:lnSpc>
-                <a:spcPct val="114000"/>
-              </a:lnSpc>
-            </a:pPr>
-            <a:r>
-              <a:rPr sz="1540" b="0">
-                <a:solidFill>
-                  <a:srgbClr val="1A1A1A"/>
-                </a:solidFill>
-                <a:latin typeface="Arial"/>
-                <a:ea typeface="微软雅黑"/>
-                <a:cs typeface="Arial"/>
-              </a:rPr>
-              <a:t>七、计算机化系统 &amp; 数据完整性问题</a:t>
-            </a:r>
-          </a:p>
-          <a:p>
-            <a:pPr algn="l">
-              <a:lnSpc>
-                <a:spcPct val="114000"/>
-              </a:lnSpc>
-            </a:pPr>
-            <a:r>
-              <a:rPr sz="1540" b="0">
-                <a:solidFill>
-                  <a:srgbClr val="1A1A1A"/>
-                </a:solidFill>
-                <a:latin typeface="Arial"/>
-                <a:ea typeface="微软雅黑"/>
-                <a:cs typeface="Arial"/>
-              </a:rPr>
-              <a:t>八、质量体系工具落地问题（偏差、变更、CAPA、OOS瞒报，调查不充分）</a:t>
-            </a:r>
-          </a:p>
-          <a:p>
-            <a:pPr algn="l">
-              <a:lnSpc>
-                <a:spcPct val="114000"/>
-              </a:lnSpc>
-            </a:pPr>
-            <a:r>
-              <a:rPr sz="1540" b="0">
-                <a:solidFill>
-                  <a:srgbClr val="1A1A1A"/>
-                </a:solidFill>
-                <a:latin typeface="Arial"/>
-                <a:ea typeface="微软雅黑"/>
-                <a:cs typeface="Arial"/>
-              </a:rPr>
-              <a:t>九、现场 EHS 合规问题（GMP + 安全生产双重要求）</a:t>
-            </a:r>
-          </a:p>
-          <a:p>
-            <a:pPr algn="l">
-              <a:lnSpc>
-                <a:spcPct val="114000"/>
-              </a:lnSpc>
-              <a:spcBef>
-                <a:spcPts val="600"/>
-              </a:spcBef>
-            </a:pPr>
-            <a:r>
-              <a:rPr sz="1540" b="1">
-                <a:solidFill>
-                  <a:srgbClr val="FF0000"/>
-                </a:solidFill>
-                <a:latin typeface="Arial"/>
-                <a:ea typeface="微软雅黑"/>
-                <a:cs typeface="Arial"/>
-              </a:rPr>
-              <a:t>重大高风险缺陷（极易导致官方警告、停产）</a:t>
-            </a:r>
-          </a:p>
-          <a:p>
-            <a:pPr algn="l" marL="292608" indent="-292608">
-              <a:lnSpc>
-                <a:spcPct val="114000"/>
-              </a:lnSpc>
-              <a:buFont typeface="Arial"/>
-              <a:buChar char="●"/>
-            </a:pPr>
-            <a:r>
-              <a:rPr sz="1540" b="0">
-                <a:solidFill>
-                  <a:srgbClr val="1A1A1A"/>
-                </a:solidFill>
-                <a:latin typeface="Arial"/>
-                <a:ea typeface="微软雅黑"/>
-                <a:cs typeface="Arial"/>
-              </a:rPr>
-              <a:t>伪造、篡改生产 / 检验原始数据；共享账号规避系统管控</a:t>
-            </a:r>
-          </a:p>
-          <a:p>
-            <a:pPr algn="l" marL="292608" indent="-292608">
-              <a:lnSpc>
-                <a:spcPct val="114000"/>
-              </a:lnSpc>
-              <a:buFont typeface="Arial"/>
-              <a:buChar char="●"/>
-            </a:pPr>
-            <a:r>
-              <a:rPr sz="1540" b="0">
-                <a:solidFill>
-                  <a:srgbClr val="1A1A1A"/>
-                </a:solidFill>
-                <a:latin typeface="Arial"/>
-                <a:ea typeface="微软雅黑"/>
-                <a:cs typeface="Arial"/>
-              </a:rPr>
-              <a:t>未经 QA 放行物料投入生产</a:t>
-            </a:r>
-          </a:p>
-          <a:p>
-            <a:pPr algn="l" marL="292608" indent="-292608">
-              <a:lnSpc>
-                <a:spcPct val="114000"/>
-              </a:lnSpc>
-              <a:buFont typeface="Arial"/>
-              <a:buChar char="●"/>
-            </a:pPr>
-            <a:r>
-              <a:rPr sz="1540" b="0">
-                <a:solidFill>
-                  <a:srgbClr val="1A1A1A"/>
-                </a:solidFill>
-                <a:latin typeface="Arial"/>
-                <a:ea typeface="微软雅黑"/>
-                <a:cs typeface="Arial"/>
-              </a:rPr>
-              <a:t>隐瞒重大异常，不报偏差，继续生产产品</a:t>
-            </a:r>
-          </a:p>
-          <a:p>
-            <a:pPr algn="l" marL="292608" indent="-292608">
-              <a:lnSpc>
-                <a:spcPct val="114000"/>
-              </a:lnSpc>
-              <a:buFont typeface="Arial"/>
-              <a:buChar char="●"/>
-            </a:pPr>
-            <a:r>
-              <a:rPr sz="1540" b="0">
-                <a:solidFill>
-                  <a:srgbClr val="1A1A1A"/>
-                </a:solidFill>
-                <a:latin typeface="Arial"/>
-                <a:ea typeface="微软雅黑"/>
-                <a:cs typeface="Arial"/>
-              </a:rPr>
-              <a:t>拆除、屏蔽设备安全、工艺联锁装置</a:t>
-            </a:r>
-          </a:p>
-          <a:p>
-            <a:pPr algn="l" marL="292608" indent="-292608">
-              <a:lnSpc>
-                <a:spcPct val="114000"/>
-              </a:lnSpc>
-              <a:buFont typeface="Arial"/>
-              <a:buChar char="●"/>
-            </a:pPr>
-            <a:r>
-              <a:rPr sz="1540" b="0">
-                <a:solidFill>
-                  <a:srgbClr val="1A1A1A"/>
-                </a:solidFill>
-                <a:latin typeface="Arial"/>
-                <a:ea typeface="微软雅黑"/>
-                <a:cs typeface="Arial"/>
-              </a:rPr>
-              <a:t>跨品种生产未有效清场，存在严重交叉污染风险</a:t>
-            </a:r>
-          </a:p>
-          <a:p>
-            <a:pPr algn="l">
-              <a:lnSpc>
-                <a:spcPct val="114000"/>
-              </a:lnSpc>
-              <a:spcBef>
-                <a:spcPts val="400"/>
-              </a:spcBef>
-            </a:pPr>
-            <a:r>
-              <a:rPr sz="1540" b="1">
-                <a:solidFill>
-                  <a:srgbClr val="1A1A1A"/>
-                </a:solidFill>
-                <a:latin typeface="Arial"/>
-                <a:ea typeface="微软雅黑"/>
-                <a:cs typeface="Arial"/>
-              </a:rPr>
-              <a:t>主要一般缺陷（日常巡检最常见）</a:t>
-            </a:r>
-          </a:p>
-          <a:p>
-            <a:pPr algn="l" marL="292608" indent="-292608">
-              <a:lnSpc>
-                <a:spcPct val="114000"/>
-              </a:lnSpc>
-              <a:buFont typeface="Arial"/>
-              <a:buChar char="●"/>
-            </a:pPr>
-            <a:r>
-              <a:rPr sz="1540" b="0">
-                <a:solidFill>
-                  <a:srgbClr val="1A1A1A"/>
-                </a:solidFill>
-                <a:latin typeface="Arial"/>
-                <a:ea typeface="微软雅黑"/>
-                <a:cs typeface="Arial"/>
-              </a:rPr>
-              <a:t>记录填写不及时、信息不全；记录修改不规范</a:t>
-            </a:r>
-          </a:p>
-          <a:p>
-            <a:pPr algn="l" marL="292608" indent="-292608">
-              <a:lnSpc>
-                <a:spcPct val="114000"/>
-              </a:lnSpc>
-              <a:buFont typeface="Arial"/>
-              <a:buChar char="●"/>
-            </a:pPr>
-            <a:r>
-              <a:rPr sz="1540" b="0">
-                <a:solidFill>
-                  <a:srgbClr val="1A1A1A"/>
-                </a:solidFill>
-                <a:latin typeface="Arial"/>
-                <a:ea typeface="微软雅黑"/>
-                <a:cs typeface="Arial"/>
-              </a:rPr>
-              <a:t>物料标识不清、容器敞口存放</a:t>
-            </a:r>
-          </a:p>
-          <a:p>
-            <a:pPr algn="l" marL="292608" indent="-292608">
-              <a:lnSpc>
-                <a:spcPct val="114000"/>
-              </a:lnSpc>
-              <a:buFont typeface="Arial"/>
-              <a:buChar char="●"/>
-            </a:pPr>
-            <a:r>
-              <a:rPr sz="1540" b="0">
-                <a:solidFill>
-                  <a:srgbClr val="1A1A1A"/>
-                </a:solidFill>
-                <a:latin typeface="Arial"/>
-                <a:ea typeface="微软雅黑"/>
-                <a:cs typeface="Arial"/>
-              </a:rPr>
-              <a:t>洁净区人员行为违规、更衣不规范</a:t>
-            </a:r>
-          </a:p>
-          <a:p>
-            <a:pPr algn="l" marL="292608" indent="-292608">
-              <a:lnSpc>
-                <a:spcPct val="114000"/>
-              </a:lnSpc>
-              <a:buFont typeface="Arial"/>
-              <a:buChar char="●"/>
-            </a:pPr>
-            <a:r>
-              <a:rPr sz="1540" b="0">
-                <a:solidFill>
-                  <a:srgbClr val="1A1A1A"/>
-                </a:solidFill>
-                <a:latin typeface="Arial"/>
-                <a:ea typeface="微软雅黑"/>
-                <a:cs typeface="Arial"/>
-              </a:rPr>
-              <a:t>环境监测超标未调查；消毒管理不规范</a:t>
-            </a:r>
-          </a:p>
-          <a:p>
-            <a:pPr algn="l" marL="292608" indent="-292608">
-              <a:lnSpc>
-                <a:spcPct val="114000"/>
-              </a:lnSpc>
-              <a:buFont typeface="Arial"/>
-              <a:buChar char="●"/>
-            </a:pPr>
-            <a:r>
-              <a:rPr sz="1540" b="0">
-                <a:solidFill>
-                  <a:srgbClr val="1A1A1A"/>
-                </a:solidFill>
-                <a:latin typeface="Arial"/>
-                <a:ea typeface="微软雅黑"/>
-                <a:cs typeface="Arial"/>
-              </a:rPr>
-              <a:t>维保、巡检记录漏记；计量器具临近 / 超校准周期</a:t>
-            </a:r>
-          </a:p>
-          <a:p>
-            <a:pPr algn="l" marL="292608" indent="-292608">
-              <a:lnSpc>
-                <a:spcPct val="114000"/>
-              </a:lnSpc>
-              <a:buFont typeface="Arial"/>
-              <a:buChar char="●"/>
-            </a:pPr>
-            <a:r>
-              <a:rPr sz="1540" b="0">
-                <a:solidFill>
-                  <a:srgbClr val="1A1A1A"/>
-                </a:solidFill>
-                <a:latin typeface="Arial"/>
-                <a:ea typeface="微软雅黑"/>
-                <a:cs typeface="Arial"/>
-              </a:rPr>
-              <a:t>审计追踪仅开启，未实施周期性审核</a:t>
-            </a:r>
-          </a:p>
-        </p:txBody>
-      </p:sp>
-      <p:sp>
-        <p:nvSpPr>
-          <p:cNvPr id="9" name="Rounded Rectangle 8"/>
-          <p:cNvSpPr/>
-          <p:nvPr/>
-        </p:nvSpPr>
-        <p:spPr>
-          <a:xfrm>
-            <a:off x="12298710" y="1645924"/>
-            <a:ext cx="11164851" cy="6661237"/>
-          </a:xfrm>
-          <a:prstGeom prst="roundRect">
-            <a:avLst>
-              <a:gd name="adj" fmla="val 4000"/>
-            </a:avLst>
-          </a:prstGeom>
-          <a:solidFill>
-            <a:srgbClr val="F7F9FD"/>
-          </a:solidFill>
-          <a:ln w="25400">
-            <a:solidFill>
-              <a:srgbClr val="C5D0E6"/>
-            </a:solidFill>
-          </a:ln>
-          <a:effectLst>
-            <a:outerShdw blurRad="76200" dist="38100" dir="5400000" rotWithShape="0">
-              <a:srgbClr val="000000">
-                <a:alpha val="18000"/>
-              </a:srgbClr>
-            </a:outerShdw>
-          </a:effectLst>
-        </p:spPr>
-        <p:style>
-          <a:lnRef idx="1">
-            <a:schemeClr val="accent1"/>
-          </a:lnRef>
-          <a:fillRef idx="3">
-            <a:schemeClr val="accent1"/>
-          </a:fillRef>
-          <a:effectRef idx="2">
-            <a:schemeClr val="accent1"/>
-          </a:effectRef>
-          <a:fontRef idx="minor">
-            <a:schemeClr val="lt1"/>
-          </a:fontRef>
-        </p:style>
-        <p:txBody>
-          <a:bodyPr rtlCol="0" anchor="ctr" wrap="square"/>
-          <a:lstStyle/>
-          <a:p>
-            <a:pPr algn="ctr"/>
-          </a:p>
-        </p:txBody>
-      </p:sp>
-      <p:sp>
-        <p:nvSpPr>
-          <p:cNvPr id="10" name="Rectangle 9"/>
-          <p:cNvSpPr/>
-          <p:nvPr/>
-        </p:nvSpPr>
-        <p:spPr>
-          <a:xfrm>
-            <a:off x="12298710" y="1645924"/>
-            <a:ext cx="109728" cy="6661237"/>
-          </a:xfrm>
-          <a:prstGeom prst="rect">
-            <a:avLst/>
-          </a:prstGeom>
-          <a:solidFill>
-            <a:srgbClr val="1D42E1"/>
-          </a:solidFill>
-          <a:ln>
-            <a:noFill/>
-          </a:ln>
-          <a:effectLst/>
-        </p:spPr>
-        <p:style>
-          <a:lnRef idx="1">
-            <a:schemeClr val="accent1"/>
-          </a:lnRef>
-          <a:fillRef idx="3">
-            <a:schemeClr val="accent1"/>
-          </a:fillRef>
-          <a:effectRef idx="2">
-            <a:schemeClr val="accent1"/>
-          </a:effectRef>
-          <a:fontRef idx="minor">
-            <a:schemeClr val="lt1"/>
-          </a:fontRef>
-        </p:style>
-        <p:txBody>
-          <a:bodyPr rtlCol="0" anchor="ctr" wrap="square"/>
-          <a:lstStyle/>
-          <a:p>
-            <a:pPr algn="ctr"/>
+              <a:t>02</a:t>
+            </a:r>
           </a:p>
         </p:txBody>
       </p:sp>
@@ -7438,8 +7473,8 @@
         </p:nvSpPr>
         <p:spPr>
           <a:xfrm>
-            <a:off x="12591319" y="1682500"/>
-            <a:ext cx="1499619" cy="804674"/>
+            <a:off x="9916151" y="2011685"/>
+            <a:ext cx="2601998" cy="841250"/>
           </a:xfrm>
           <a:prstGeom prst="rect">
             <a:avLst/>
@@ -7454,11 +7489,11 @@
           <a:p>
             <a:pPr algn="l">
               <a:lnSpc>
-                <a:spcPct val="128000"/>
+                <a:spcPct val="108000"/>
               </a:lnSpc>
             </a:pPr>
             <a:r>
-              <a:rPr sz="4800" b="1" i="0">
+              <a:rPr sz="1900" b="1" i="0">
                 <a:solidFill>
                   <a:srgbClr val="132556"/>
                 </a:solidFill>
@@ -7466,21 +7501,56 @@
                 <a:ea typeface="微软雅黑"/>
                 <a:cs typeface="Arial"/>
               </a:rPr>
-              <a:t>02</a:t>
-            </a:r>
-          </a:p>
-        </p:txBody>
-      </p:sp>
-      <p:sp>
-        <p:nvSpPr>
-          <p:cNvPr id="12" name="TextBox 11"/>
+              <a:t>QC 实验室常见 GMP 违规行为</a:t>
+            </a:r>
+          </a:p>
+        </p:txBody>
+      </p:sp>
+      <p:cxnSp>
+        <p:nvCxnSpPr>
+          <p:cNvPr id="12" name="Connector 11"/>
+          <p:cNvCxnSpPr/>
+          <p:nvPr/>
+        </p:nvCxnSpPr>
+        <p:spPr>
+          <a:xfrm>
+            <a:off x="8160499" y="2926087"/>
+            <a:ext cx="4357651" cy="0"/>
+          </a:xfrm>
+          <a:prstGeom prst="line">
+            <a:avLst/>
+          </a:prstGeom>
+          <a:ln w="31750">
+            <a:solidFill>
+              <a:srgbClr val="C5D0E6"/>
+            </a:solidFill>
+          </a:ln>
+        </p:spPr>
+        <p:style>
+          <a:lnRef idx="2">
+            <a:schemeClr val="accent1"/>
+          </a:lnRef>
+          <a:fillRef idx="0">
+            <a:schemeClr val="accent1"/>
+          </a:fillRef>
+          <a:effectRef idx="1">
+            <a:schemeClr val="accent1"/>
+          </a:effectRef>
+          <a:fontRef idx="minor">
+            <a:schemeClr val="tx1"/>
+          </a:fontRef>
+        </p:style>
+      </p:cxnSp>
+      <p:sp>
+        <p:nvSpPr>
+          <p:cNvPr id="13" name="TextBox 12"/>
           <p:cNvSpPr txBox="1"/>
           <p:nvPr/>
         </p:nvSpPr>
         <p:spPr>
           <a:xfrm>
-            <a:off x="14036075" y="1755652"/>
-            <a:ext cx="9061726" cy="658369"/>
+            <a:off x="8270227" y="3145543"/>
+            <a:ext cx="4247922" cy="9144022"/>
           </a:xfrm>
           <a:prstGeom prst="rect">
             <a:avLst/>
@@ -7488,40 +7558,283 @@
           <a:noFill/>
         </p:spPr>
         <p:txBody>
-          <a:bodyPr wrap="square" lIns="0" rIns="0" tIns="0" bIns="0" anchor="ctr">
+          <a:bodyPr wrap="square" lIns="0" rIns="0" tIns="0" bIns="0" anchor="t">
             <a:spAutoFit/>
           </a:bodyPr>
           <a:lstStyle/>
           <a:p>
             <a:pPr algn="l">
               <a:lnSpc>
-                <a:spcPct val="108000"/>
+                <a:spcPct val="120000"/>
               </a:lnSpc>
             </a:pPr>
             <a:r>
-              <a:rPr sz="2400" b="1" i="0">
-                <a:solidFill>
-                  <a:srgbClr val="132556"/>
+              <a:rPr sz="1860" b="0">
+                <a:solidFill>
+                  <a:srgbClr val="1A1A1A"/>
                 </a:solidFill>
                 <a:latin typeface="Arial"/>
                 <a:ea typeface="微软雅黑"/>
                 <a:cs typeface="Arial"/>
               </a:rPr>
-              <a:t>QC 实验室常见 GMP 违规行为</a:t>
+              <a:t>一、样品管理类（高频问题）；</a:t>
+            </a:r>
+          </a:p>
+          <a:p>
+            <a:pPr algn="l">
+              <a:lnSpc>
+                <a:spcPct val="120000"/>
+              </a:lnSpc>
+              <a:spcBef>
+                <a:spcPts val="640"/>
+              </a:spcBef>
+            </a:pPr>
+            <a:r>
+              <a:rPr sz="1860" b="0">
+                <a:solidFill>
+                  <a:srgbClr val="1A1A1A"/>
+                </a:solidFill>
+                <a:latin typeface="Arial"/>
+                <a:ea typeface="微软雅黑"/>
+                <a:cs typeface="Arial"/>
+              </a:rPr>
+              <a:t>二、检验操作行为违规</a:t>
+            </a:r>
+          </a:p>
+          <a:p>
+            <a:pPr algn="l">
+              <a:lnSpc>
+                <a:spcPct val="120000"/>
+              </a:lnSpc>
+              <a:spcBef>
+                <a:spcPts val="640"/>
+              </a:spcBef>
+            </a:pPr>
+            <a:r>
+              <a:rPr sz="1860" b="0">
+                <a:solidFill>
+                  <a:srgbClr val="1A1A1A"/>
+                </a:solidFill>
+                <a:latin typeface="Arial"/>
+                <a:ea typeface="微软雅黑"/>
+                <a:cs typeface="Arial"/>
+              </a:rPr>
+              <a:t>三、原始记录与数据完整性（GMP 红线，重大违规）</a:t>
+            </a:r>
+          </a:p>
+          <a:p>
+            <a:pPr algn="l">
+              <a:lnSpc>
+                <a:spcPct val="120000"/>
+              </a:lnSpc>
+              <a:spcBef>
+                <a:spcPts val="640"/>
+              </a:spcBef>
+            </a:pPr>
+            <a:r>
+              <a:rPr sz="1860" b="0">
+                <a:solidFill>
+                  <a:srgbClr val="1A1A1A"/>
+                </a:solidFill>
+                <a:latin typeface="Arial"/>
+                <a:ea typeface="微软雅黑"/>
+                <a:cs typeface="Arial"/>
+              </a:rPr>
+              <a:t>四、仪器设备管理违规；</a:t>
+            </a:r>
+          </a:p>
+          <a:p>
+            <a:pPr algn="l">
+              <a:lnSpc>
+                <a:spcPct val="120000"/>
+              </a:lnSpc>
+              <a:spcBef>
+                <a:spcPts val="640"/>
+              </a:spcBef>
+            </a:pPr>
+            <a:r>
+              <a:rPr sz="1860" b="0">
+                <a:solidFill>
+                  <a:srgbClr val="1A1A1A"/>
+                </a:solidFill>
+                <a:latin typeface="Arial"/>
+                <a:ea typeface="微软雅黑"/>
+                <a:cs typeface="Arial"/>
+              </a:rPr>
+              <a:t>五、试剂、试液、标准品、培养基管理；</a:t>
+            </a:r>
+          </a:p>
+          <a:p>
+            <a:pPr algn="l">
+              <a:lnSpc>
+                <a:spcPct val="120000"/>
+              </a:lnSpc>
+              <a:spcBef>
+                <a:spcPts val="640"/>
+              </a:spcBef>
+            </a:pPr>
+            <a:r>
+              <a:rPr sz="1860" b="0">
+                <a:solidFill>
+                  <a:srgbClr val="1A1A1A"/>
+                </a:solidFill>
+                <a:latin typeface="Arial"/>
+                <a:ea typeface="微软雅黑"/>
+                <a:cs typeface="Arial"/>
+              </a:rPr>
+              <a:t>六、实验室环境、清洁消毒、微生物专项违规</a:t>
+            </a:r>
+          </a:p>
+          <a:p>
+            <a:pPr algn="l">
+              <a:lnSpc>
+                <a:spcPct val="120000"/>
+              </a:lnSpc>
+              <a:spcBef>
+                <a:spcPts val="640"/>
+              </a:spcBef>
+            </a:pPr>
+            <a:r>
+              <a:rPr sz="1860" b="0">
+                <a:solidFill>
+                  <a:srgbClr val="1A1A1A"/>
+                </a:solidFill>
+                <a:latin typeface="Arial"/>
+                <a:ea typeface="微软雅黑"/>
+                <a:cs typeface="Arial"/>
+              </a:rPr>
+              <a:t>七、文件、报告、偏差 OOS 管理，调查</a:t>
+            </a:r>
+          </a:p>
+          <a:p>
+            <a:pPr algn="l">
+              <a:lnSpc>
+                <a:spcPct val="120000"/>
+              </a:lnSpc>
+              <a:spcBef>
+                <a:spcPts val="640"/>
+              </a:spcBef>
+            </a:pPr>
+            <a:r>
+              <a:rPr sz="1860" b="0">
+                <a:solidFill>
+                  <a:srgbClr val="1A1A1A"/>
+                </a:solidFill>
+                <a:latin typeface="Arial"/>
+                <a:ea typeface="微软雅黑"/>
+                <a:cs typeface="Arial"/>
+              </a:rPr>
+              <a:t>八、人员卫生与行为规范</a:t>
+            </a:r>
+          </a:p>
+          <a:p>
+            <a:pPr algn="l">
+              <a:lnSpc>
+                <a:spcPct val="120000"/>
+              </a:lnSpc>
+              <a:spcBef>
+                <a:spcPts val="2440"/>
+              </a:spcBef>
+            </a:pPr>
+            <a:r>
+              <a:rPr sz="1860" b="1">
+                <a:solidFill>
+                  <a:srgbClr val="D40000"/>
+                </a:solidFill>
+                <a:latin typeface="Arial"/>
+                <a:ea typeface="微软雅黑"/>
+                <a:cs typeface="Arial"/>
+              </a:rPr>
+              <a:t>重大高风险缺陷：</a:t>
+            </a:r>
+            <a:r>
+              <a:rPr sz="1860" b="0">
+                <a:solidFill>
+                  <a:srgbClr val="1A1A1A"/>
+                </a:solidFill>
+                <a:latin typeface="Arial"/>
+                <a:ea typeface="微软雅黑"/>
+                <a:cs typeface="Arial"/>
+              </a:rPr>
+              <a:t>伪造数据、删除图谱、共用账号、隐瞒 OOS 结果、擅自更改检验方法、挪用留样</a:t>
+            </a:r>
+          </a:p>
+          <a:p>
+            <a:pPr algn="l">
+              <a:lnSpc>
+                <a:spcPct val="120000"/>
+              </a:lnSpc>
+              <a:spcBef>
+                <a:spcPts val="2040"/>
+              </a:spcBef>
+            </a:pPr>
+            <a:r>
+              <a:rPr sz="1860" b="1">
+                <a:solidFill>
+                  <a:srgbClr val="1A1A1A"/>
+                </a:solidFill>
+                <a:latin typeface="Arial"/>
+                <a:ea typeface="微软雅黑"/>
+                <a:cs typeface="Arial"/>
+              </a:rPr>
+              <a:t>一般违规：</a:t>
+            </a:r>
+            <a:r>
+              <a:rPr sz="1860" b="0">
+                <a:solidFill>
+                  <a:srgbClr val="1A1A1A"/>
+                </a:solidFill>
+                <a:latin typeface="Arial"/>
+                <a:ea typeface="微软雅黑"/>
+                <a:cs typeface="Arial"/>
+              </a:rPr>
+              <a:t>样品存放条件不达标、漏做仪器日常核查、试剂标识不全、未及时填写设备日志；</a:t>
+            </a:r>
+          </a:p>
+          <a:p>
+            <a:pPr algn="l">
+              <a:lnSpc>
+                <a:spcPct val="120000"/>
+              </a:lnSpc>
+              <a:spcBef>
+                <a:spcPts val="2040"/>
+              </a:spcBef>
+            </a:pPr>
+            <a:r>
+              <a:rPr sz="1860" b="1">
+                <a:solidFill>
+                  <a:srgbClr val="1A1A1A"/>
+                </a:solidFill>
+                <a:latin typeface="Arial"/>
+                <a:ea typeface="微软雅黑"/>
+                <a:cs typeface="Arial"/>
+              </a:rPr>
+              <a:t>轻微违规：</a:t>
+            </a:r>
+            <a:r>
+              <a:rPr sz="1860" b="0">
+                <a:solidFill>
+                  <a:srgbClr val="1A1A1A"/>
+                </a:solidFill>
+                <a:latin typeface="Arial"/>
+                <a:ea typeface="微软雅黑"/>
+                <a:cs typeface="Arial"/>
+              </a:rPr>
+              <a:t>记录书写不规范、物品摆放杂乱、清洁不及时、标识粘贴不整齐；</a:t>
             </a:r>
           </a:p>
         </p:txBody>
       </p:sp>
       <p:cxnSp>
         <p:nvCxnSpPr>
-          <p:cNvPr id="13" name="Connector 12"/>
+          <p:cNvPr id="14" name="Connector 13"/>
           <p:cNvCxnSpPr/>
           <p:nvPr/>
         </p:nvCxnSpPr>
         <p:spPr>
           <a:xfrm>
-            <a:off x="12591319" y="2523750"/>
-            <a:ext cx="10616211" cy="0"/>
+            <a:off x="12737607" y="2121413"/>
+            <a:ext cx="0" cy="10277881"/>
           </a:xfrm>
           <a:prstGeom prst="line">
             <a:avLst/>
@@ -7549,14 +7862,14 @@
       </p:cxnSp>
       <p:sp>
         <p:nvSpPr>
-          <p:cNvPr id="14" name="TextBox 13"/>
+          <p:cNvPr id="15" name="TextBox 14"/>
           <p:cNvSpPr txBox="1"/>
           <p:nvPr/>
         </p:nvSpPr>
         <p:spPr>
           <a:xfrm>
-            <a:off x="12664471" y="2633478"/>
-            <a:ext cx="10506482" cy="5527378"/>
+            <a:off x="12957063" y="2011685"/>
+            <a:ext cx="1572771" cy="841250"/>
           </a:xfrm>
           <a:prstGeom prst="rect">
             <a:avLst/>
@@ -7564,360 +7877,40 @@
           <a:noFill/>
         </p:spPr>
         <p:txBody>
-          <a:bodyPr wrap="square" lIns="0" rIns="0" tIns="0" bIns="0" anchor="t">
+          <a:bodyPr wrap="square" lIns="0" rIns="0" tIns="0" bIns="0" anchor="ctr">
             <a:spAutoFit/>
           </a:bodyPr>
           <a:lstStyle/>
           <a:p>
             <a:pPr algn="l">
               <a:lnSpc>
-                <a:spcPct val="114000"/>
+                <a:spcPct val="128000"/>
               </a:lnSpc>
             </a:pPr>
             <a:r>
-              <a:rPr sz="1800" b="0">
-                <a:solidFill>
-                  <a:srgbClr val="1A1A1A"/>
+              <a:rPr sz="5200" b="1" i="0">
+                <a:solidFill>
+                  <a:srgbClr val="132556"/>
                 </a:solidFill>
                 <a:latin typeface="Arial"/>
                 <a:ea typeface="微软雅黑"/>
                 <a:cs typeface="Arial"/>
               </a:rPr>
-              <a:t>一、样品管理类（高频问题）；</a:t>
-            </a:r>
-          </a:p>
-          <a:p>
-            <a:pPr algn="l">
-              <a:lnSpc>
-                <a:spcPct val="114000"/>
-              </a:lnSpc>
-            </a:pPr>
-            <a:r>
-              <a:rPr sz="1800" b="0">
-                <a:solidFill>
-                  <a:srgbClr val="1A1A1A"/>
-                </a:solidFill>
-                <a:latin typeface="Arial"/>
-                <a:ea typeface="微软雅黑"/>
-                <a:cs typeface="Arial"/>
-              </a:rPr>
-              <a:t>二、检验操作行为违规</a:t>
-            </a:r>
-          </a:p>
-          <a:p>
-            <a:pPr algn="l">
-              <a:lnSpc>
-                <a:spcPct val="114000"/>
-              </a:lnSpc>
-            </a:pPr>
-            <a:r>
-              <a:rPr sz="1800" b="0">
-                <a:solidFill>
-                  <a:srgbClr val="1A1A1A"/>
-                </a:solidFill>
-                <a:latin typeface="Arial"/>
-                <a:ea typeface="微软雅黑"/>
-                <a:cs typeface="Arial"/>
-              </a:rPr>
-              <a:t>三、原始记录与数据完整性（GMP 红线，重大违规）</a:t>
-            </a:r>
-          </a:p>
-          <a:p>
-            <a:pPr algn="l">
-              <a:lnSpc>
-                <a:spcPct val="114000"/>
-              </a:lnSpc>
-            </a:pPr>
-            <a:r>
-              <a:rPr sz="1800" b="0">
-                <a:solidFill>
-                  <a:srgbClr val="1A1A1A"/>
-                </a:solidFill>
-                <a:latin typeface="Arial"/>
-                <a:ea typeface="微软雅黑"/>
-                <a:cs typeface="Arial"/>
-              </a:rPr>
-              <a:t>四、仪器设备管理违规；</a:t>
-            </a:r>
-          </a:p>
-          <a:p>
-            <a:pPr algn="l">
-              <a:lnSpc>
-                <a:spcPct val="114000"/>
-              </a:lnSpc>
-            </a:pPr>
-            <a:r>
-              <a:rPr sz="1800" b="0">
-                <a:solidFill>
-                  <a:srgbClr val="1A1A1A"/>
-                </a:solidFill>
-                <a:latin typeface="Arial"/>
-                <a:ea typeface="微软雅黑"/>
-                <a:cs typeface="Arial"/>
-              </a:rPr>
-              <a:t>五、试剂、试液、标准品、培养基管理；</a:t>
-            </a:r>
-          </a:p>
-          <a:p>
-            <a:pPr algn="l">
-              <a:lnSpc>
-                <a:spcPct val="114000"/>
-              </a:lnSpc>
-            </a:pPr>
-            <a:r>
-              <a:rPr sz="1800" b="0">
-                <a:solidFill>
-                  <a:srgbClr val="1A1A1A"/>
-                </a:solidFill>
-                <a:latin typeface="Arial"/>
-                <a:ea typeface="微软雅黑"/>
-                <a:cs typeface="Arial"/>
-              </a:rPr>
-              <a:t>六、实验室环境、清洁消毒、微生物专项违规</a:t>
-            </a:r>
-          </a:p>
-          <a:p>
-            <a:pPr algn="l">
-              <a:lnSpc>
-                <a:spcPct val="114000"/>
-              </a:lnSpc>
-            </a:pPr>
-            <a:r>
-              <a:rPr sz="1800" b="0">
-                <a:solidFill>
-                  <a:srgbClr val="1A1A1A"/>
-                </a:solidFill>
-                <a:latin typeface="Arial"/>
-                <a:ea typeface="微软雅黑"/>
-                <a:cs typeface="Arial"/>
-              </a:rPr>
-              <a:t>七、文件、报告、偏差 OOS 管理，调查</a:t>
-            </a:r>
-          </a:p>
-          <a:p>
-            <a:pPr algn="l">
-              <a:lnSpc>
-                <a:spcPct val="114000"/>
-              </a:lnSpc>
-            </a:pPr>
-            <a:r>
-              <a:rPr sz="1800" b="0">
-                <a:solidFill>
-                  <a:srgbClr val="1A1A1A"/>
-                </a:solidFill>
-                <a:latin typeface="Arial"/>
-                <a:ea typeface="微软雅黑"/>
-                <a:cs typeface="Arial"/>
-              </a:rPr>
-              <a:t>八、人员卫生与行为规范</a:t>
-            </a:r>
-          </a:p>
-          <a:p>
-            <a:pPr algn="l">
-              <a:lnSpc>
-                <a:spcPct val="114000"/>
-              </a:lnSpc>
-              <a:spcBef>
-                <a:spcPts val="1000"/>
-              </a:spcBef>
-            </a:pPr>
-            <a:r>
-              <a:rPr sz="1800" b="1">
-                <a:solidFill>
-                  <a:srgbClr val="FF0000"/>
-                </a:solidFill>
-                <a:latin typeface="Arial"/>
-                <a:ea typeface="微软雅黑"/>
-                <a:cs typeface="Arial"/>
-              </a:rPr>
-              <a:t>重大高风险缺陷：</a:t>
-            </a:r>
-            <a:r>
-              <a:rPr sz="1800" b="0">
-                <a:solidFill>
-                  <a:srgbClr val="1A1A1A"/>
-                </a:solidFill>
-                <a:latin typeface="Arial"/>
-                <a:ea typeface="微软雅黑"/>
-                <a:cs typeface="Arial"/>
-              </a:rPr>
-              <a:t>伪造数据、删除图谱、共用账号、隐瞒 OOS 结果、擅自更改检验方法、挪用留样</a:t>
-            </a:r>
-          </a:p>
-          <a:p>
-            <a:pPr algn="l">
-              <a:lnSpc>
-                <a:spcPct val="114000"/>
-              </a:lnSpc>
-              <a:spcBef>
-                <a:spcPts val="600"/>
-              </a:spcBef>
-            </a:pPr>
-            <a:r>
-              <a:rPr sz="1800" b="1">
-                <a:solidFill>
-                  <a:srgbClr val="1A1A1A"/>
-                </a:solidFill>
-                <a:latin typeface="Arial"/>
-                <a:ea typeface="微软雅黑"/>
-                <a:cs typeface="Arial"/>
-              </a:rPr>
-              <a:t>一般违规：</a:t>
-            </a:r>
-            <a:r>
-              <a:rPr sz="1800" b="0">
-                <a:solidFill>
-                  <a:srgbClr val="1A1A1A"/>
-                </a:solidFill>
-                <a:latin typeface="Arial"/>
-                <a:ea typeface="微软雅黑"/>
-                <a:cs typeface="Arial"/>
-              </a:rPr>
-              <a:t>样品存放条件不达标、漏做仪器日常核查、试剂标识不全、未及时填写设备日志；</a:t>
-            </a:r>
-          </a:p>
-          <a:p>
-            <a:pPr algn="l">
-              <a:lnSpc>
-                <a:spcPct val="114000"/>
-              </a:lnSpc>
-              <a:spcBef>
-                <a:spcPts val="600"/>
-              </a:spcBef>
-            </a:pPr>
-            <a:r>
-              <a:rPr sz="1800" b="1">
-                <a:solidFill>
-                  <a:srgbClr val="1A1A1A"/>
-                </a:solidFill>
-                <a:latin typeface="Arial"/>
-                <a:ea typeface="微软雅黑"/>
-                <a:cs typeface="Arial"/>
-              </a:rPr>
-              <a:t>轻微违规：</a:t>
-            </a:r>
-            <a:r>
-              <a:rPr sz="1800" b="0">
-                <a:solidFill>
-                  <a:srgbClr val="1A1A1A"/>
-                </a:solidFill>
-                <a:latin typeface="Arial"/>
-                <a:ea typeface="微软雅黑"/>
-                <a:cs typeface="Arial"/>
-              </a:rPr>
-              <a:t>记录书写不规范、物品摆放杂乱、清洁不及时、标识粘贴不整齐；</a:t>
-            </a:r>
-          </a:p>
-        </p:txBody>
-      </p:sp>
-      <p:sp>
-        <p:nvSpPr>
-          <p:cNvPr id="15" name="Rounded Rectangle 14"/>
-          <p:cNvSpPr/>
+              <a:t>03</a:t>
+            </a:r>
+          </a:p>
+        </p:txBody>
+      </p:sp>
+      <p:sp>
+        <p:nvSpPr>
+          <p:cNvPr id="16" name="TextBox 15"/>
+          <p:cNvSpPr txBox="1"/>
           <p:nvPr/>
         </p:nvSpPr>
         <p:spPr>
           <a:xfrm>
-            <a:off x="914402" y="8490042"/>
-            <a:ext cx="11164851" cy="4640774"/>
-          </a:xfrm>
-          <a:prstGeom prst="roundRect">
-            <a:avLst>
-              <a:gd name="adj" fmla="val 4000"/>
-            </a:avLst>
-          </a:prstGeom>
-          <a:solidFill>
-            <a:srgbClr val="F7F9FD"/>
-          </a:solidFill>
-          <a:ln w="25400">
-            <a:solidFill>
-              <a:srgbClr val="C5D0E6"/>
-            </a:solidFill>
-          </a:ln>
-          <a:effectLst>
-            <a:outerShdw blurRad="76200" dist="38100" dir="5400000" rotWithShape="0">
-              <a:srgbClr val="000000">
-                <a:alpha val="18000"/>
-              </a:srgbClr>
-            </a:outerShdw>
-          </a:effectLst>
-        </p:spPr>
-        <p:style>
-          <a:lnRef idx="1">
-            <a:schemeClr val="accent1"/>
-          </a:lnRef>
-          <a:fillRef idx="3">
-            <a:schemeClr val="accent1"/>
-          </a:fillRef>
-          <a:effectRef idx="2">
-            <a:schemeClr val="accent1"/>
-          </a:effectRef>
-          <a:fontRef idx="minor">
-            <a:schemeClr val="lt1"/>
-          </a:fontRef>
-        </p:style>
-        <p:txBody>
-          <a:bodyPr rtlCol="0" anchor="ctr" wrap="square"/>
-          <a:lstStyle/>
-          <a:p>
-            <a:pPr algn="ctr"/>
-          </a:p>
-        </p:txBody>
-      </p:sp>
-      <p:sp>
-        <p:nvSpPr>
-          <p:cNvPr id="16" name="Rectangle 15"/>
-          <p:cNvSpPr/>
-          <p:nvPr/>
-        </p:nvSpPr>
-        <p:spPr>
-          <a:xfrm>
-            <a:off x="914402" y="8490042"/>
-            <a:ext cx="109728" cy="4640774"/>
-          </a:xfrm>
-          <a:prstGeom prst="rect">
-            <a:avLst/>
-          </a:prstGeom>
-          <a:solidFill>
-            <a:srgbClr val="1D42E1"/>
-          </a:solidFill>
-          <a:ln>
-            <a:noFill/>
-          </a:ln>
-          <a:effectLst/>
-        </p:spPr>
-        <p:style>
-          <a:lnRef idx="1">
-            <a:schemeClr val="accent1"/>
-          </a:lnRef>
-          <a:fillRef idx="3">
-            <a:schemeClr val="accent1"/>
-          </a:fillRef>
-          <a:effectRef idx="2">
-            <a:schemeClr val="accent1"/>
-          </a:effectRef>
-          <a:fontRef idx="minor">
-            <a:schemeClr val="lt1"/>
-          </a:fontRef>
-        </p:style>
-        <p:txBody>
-          <a:bodyPr rtlCol="0" anchor="ctr" wrap="square"/>
-          <a:lstStyle/>
-          <a:p>
-            <a:pPr algn="ctr"/>
-          </a:p>
-        </p:txBody>
-      </p:sp>
-      <p:sp>
-        <p:nvSpPr>
-          <p:cNvPr id="17" name="TextBox 16"/>
-          <p:cNvSpPr txBox="1"/>
-          <p:nvPr/>
-        </p:nvSpPr>
-        <p:spPr>
-          <a:xfrm>
-            <a:off x="1207011" y="8526618"/>
-            <a:ext cx="1499619" cy="804674"/>
+            <a:off x="14712715" y="2011685"/>
+            <a:ext cx="2858458" cy="841250"/>
           </a:xfrm>
           <a:prstGeom prst="rect">
             <a:avLst/>
@@ -7932,11 +7925,11 @@
           <a:p>
             <a:pPr algn="l">
               <a:lnSpc>
-                <a:spcPct val="128000"/>
+                <a:spcPct val="108000"/>
               </a:lnSpc>
             </a:pPr>
             <a:r>
-              <a:rPr sz="4800" b="1" i="0">
+              <a:rPr sz="1900" b="1" i="0">
                 <a:solidFill>
                   <a:srgbClr val="132556"/>
                 </a:solidFill>
@@ -7944,11 +7937,46 @@
                 <a:ea typeface="微软雅黑"/>
                 <a:cs typeface="Arial"/>
               </a:rPr>
-              <a:t>03</a:t>
-            </a:r>
-          </a:p>
-        </p:txBody>
-      </p:sp>
+              <a:t>计算机化系统</a:t>
+            </a:r>
+          </a:p>
+        </p:txBody>
+      </p:sp>
+      <p:cxnSp>
+        <p:nvCxnSpPr>
+          <p:cNvPr id="17" name="Connector 16"/>
+          <p:cNvCxnSpPr/>
+          <p:nvPr/>
+        </p:nvCxnSpPr>
+        <p:spPr>
+          <a:xfrm>
+            <a:off x="12957063" y="2926087"/>
+            <a:ext cx="4614111" cy="0"/>
+          </a:xfrm>
+          <a:prstGeom prst="line">
+            <a:avLst/>
+          </a:prstGeom>
+          <a:ln w="31750">
+            <a:solidFill>
+              <a:srgbClr val="C5D0E6"/>
+            </a:solidFill>
+          </a:ln>
+        </p:spPr>
+        <p:style>
+          <a:lnRef idx="2">
+            <a:schemeClr val="accent1"/>
+          </a:lnRef>
+          <a:fillRef idx="0">
+            <a:schemeClr val="accent1"/>
+          </a:fillRef>
+          <a:effectRef idx="1">
+            <a:schemeClr val="accent1"/>
+          </a:effectRef>
+          <a:fontRef idx="minor">
+            <a:schemeClr val="tx1"/>
+          </a:fontRef>
+        </p:style>
+      </p:cxnSp>
       <p:sp>
         <p:nvSpPr>
           <p:cNvPr id="18" name="TextBox 17"/>
@@ -7957,8 +7985,8 @@
         </p:nvSpPr>
         <p:spPr>
           <a:xfrm>
-            <a:off x="2651766" y="8599770"/>
-            <a:ext cx="9061726" cy="658369"/>
+            <a:off x="13066791" y="3145543"/>
+            <a:ext cx="4504382" cy="9144022"/>
           </a:xfrm>
           <a:prstGeom prst="rect">
             <a:avLst/>
@@ -7966,26 +7994,257 @@
           <a:noFill/>
         </p:spPr>
         <p:txBody>
-          <a:bodyPr wrap="square" lIns="0" rIns="0" tIns="0" bIns="0" anchor="ctr">
+          <a:bodyPr wrap="square" lIns="0" rIns="0" tIns="0" bIns="0" anchor="t">
             <a:spAutoFit/>
           </a:bodyPr>
           <a:lstStyle/>
           <a:p>
             <a:pPr algn="l">
               <a:lnSpc>
-                <a:spcPct val="108000"/>
+                <a:spcPct val="120000"/>
               </a:lnSpc>
             </a:pPr>
             <a:r>
-              <a:rPr sz="2400" b="1" i="0">
-                <a:solidFill>
-                  <a:srgbClr val="132556"/>
+              <a:rPr sz="1860" b="0">
+                <a:solidFill>
+                  <a:srgbClr val="1A1A1A"/>
                 </a:solidFill>
                 <a:latin typeface="Arial"/>
                 <a:ea typeface="微软雅黑"/>
                 <a:cs typeface="Arial"/>
               </a:rPr>
-              <a:t>计算机化系统</a:t>
+              <a:t>一、用户访问与账号权限持续管理</a:t>
+            </a:r>
+          </a:p>
+          <a:p>
+            <a:pPr algn="l">
+              <a:lnSpc>
+                <a:spcPct val="120000"/>
+              </a:lnSpc>
+              <a:spcBef>
+                <a:spcPts val="640"/>
+              </a:spcBef>
+            </a:pPr>
+            <a:r>
+              <a:rPr sz="1860" b="0">
+                <a:solidFill>
+                  <a:srgbClr val="1A1A1A"/>
+                </a:solidFill>
+                <a:latin typeface="Arial"/>
+                <a:ea typeface="微软雅黑"/>
+                <a:cs typeface="Arial"/>
+              </a:rPr>
+              <a:t>二、审计追踪（Audit Trail）常态化管理（核查高频重点）</a:t>
+            </a:r>
+          </a:p>
+          <a:p>
+            <a:pPr algn="l">
+              <a:lnSpc>
+                <a:spcPct val="120000"/>
+              </a:lnSpc>
+              <a:spcBef>
+                <a:spcPts val="640"/>
+              </a:spcBef>
+            </a:pPr>
+            <a:r>
+              <a:rPr sz="1860" b="0">
+                <a:solidFill>
+                  <a:srgbClr val="1A1A1A"/>
+                </a:solidFill>
+                <a:latin typeface="Arial"/>
+                <a:ea typeface="微软雅黑"/>
+                <a:cs typeface="Arial"/>
+              </a:rPr>
+              <a:t>三、系统日常运维管理（所有运维操作不能脱离 GMP 体系）</a:t>
+            </a:r>
+          </a:p>
+          <a:p>
+            <a:pPr algn="l">
+              <a:lnSpc>
+                <a:spcPct val="120000"/>
+              </a:lnSpc>
+              <a:spcBef>
+                <a:spcPts val="640"/>
+              </a:spcBef>
+            </a:pPr>
+            <a:r>
+              <a:rPr sz="1860" b="0">
+                <a:solidFill>
+                  <a:srgbClr val="1A1A1A"/>
+                </a:solidFill>
+                <a:latin typeface="Arial"/>
+                <a:ea typeface="微软雅黑"/>
+                <a:cs typeface="Arial"/>
+              </a:rPr>
+              <a:t>四、备份管理与定期灾难恢复演练</a:t>
+            </a:r>
+          </a:p>
+          <a:p>
+            <a:pPr algn="l">
+              <a:lnSpc>
+                <a:spcPct val="120000"/>
+              </a:lnSpc>
+              <a:spcBef>
+                <a:spcPts val="640"/>
+              </a:spcBef>
+            </a:pPr>
+            <a:r>
+              <a:rPr sz="1860" b="0">
+                <a:solidFill>
+                  <a:srgbClr val="1A1A1A"/>
+                </a:solidFill>
+                <a:latin typeface="Arial"/>
+                <a:ea typeface="微软雅黑"/>
+                <a:cs typeface="Arial"/>
+              </a:rPr>
+              <a:t>五、电子记录、电子签名日常管控</a:t>
+            </a:r>
+          </a:p>
+          <a:p>
+            <a:pPr algn="l">
+              <a:lnSpc>
+                <a:spcPct val="120000"/>
+              </a:lnSpc>
+              <a:spcBef>
+                <a:spcPts val="640"/>
+              </a:spcBef>
+            </a:pPr>
+            <a:r>
+              <a:rPr sz="1860" b="0">
+                <a:solidFill>
+                  <a:srgbClr val="1A1A1A"/>
+                </a:solidFill>
+                <a:latin typeface="Arial"/>
+                <a:ea typeface="微软雅黑"/>
+                <a:cs typeface="Arial"/>
+              </a:rPr>
+              <a:t>六、系统异常事件、故障管理（IT 与质量体系打通）</a:t>
+            </a:r>
+          </a:p>
+          <a:p>
+            <a:pPr algn="l">
+              <a:lnSpc>
+                <a:spcPct val="120000"/>
+              </a:lnSpc>
+              <a:spcBef>
+                <a:spcPts val="640"/>
+              </a:spcBef>
+            </a:pPr>
+            <a:r>
+              <a:rPr sz="1860" b="0">
+                <a:solidFill>
+                  <a:srgbClr val="1A1A1A"/>
+                </a:solidFill>
+                <a:latin typeface="Arial"/>
+                <a:ea typeface="微软雅黑"/>
+                <a:cs typeface="Arial"/>
+              </a:rPr>
+              <a:t>七、变更控制—— 运行阶段所有系统变更必经流程</a:t>
+            </a:r>
+          </a:p>
+          <a:p>
+            <a:pPr algn="l">
+              <a:lnSpc>
+                <a:spcPct val="120000"/>
+              </a:lnSpc>
+              <a:spcBef>
+                <a:spcPts val="640"/>
+              </a:spcBef>
+            </a:pPr>
+            <a:r>
+              <a:rPr sz="1860" b="0">
+                <a:solidFill>
+                  <a:srgbClr val="1A1A1A"/>
+                </a:solidFill>
+                <a:latin typeface="Arial"/>
+                <a:ea typeface="微软雅黑"/>
+                <a:cs typeface="Arial"/>
+              </a:rPr>
+              <a:t>八、供应商持续管理（外购软件、SaaS 云系统重点）</a:t>
+            </a:r>
+          </a:p>
+          <a:p>
+            <a:pPr algn="l">
+              <a:lnSpc>
+                <a:spcPct val="120000"/>
+              </a:lnSpc>
+              <a:spcBef>
+                <a:spcPts val="640"/>
+              </a:spcBef>
+            </a:pPr>
+            <a:r>
+              <a:rPr sz="1860" b="0">
+                <a:solidFill>
+                  <a:srgbClr val="1A1A1A"/>
+                </a:solidFill>
+                <a:latin typeface="Arial"/>
+                <a:ea typeface="微软雅黑"/>
+                <a:cs typeface="Arial"/>
+              </a:rPr>
+              <a:t>十、人员持续培训与行为监督</a:t>
+            </a:r>
+          </a:p>
+          <a:p>
+            <a:pPr algn="l">
+              <a:lnSpc>
+                <a:spcPct val="120000"/>
+              </a:lnSpc>
+              <a:spcBef>
+                <a:spcPts val="640"/>
+              </a:spcBef>
+            </a:pPr>
+            <a:r>
+              <a:rPr sz="1860" b="0">
+                <a:solidFill>
+                  <a:srgbClr val="1A1A1A"/>
+                </a:solidFill>
+                <a:latin typeface="Arial"/>
+                <a:ea typeface="微软雅黑"/>
+                <a:cs typeface="Arial"/>
+              </a:rPr>
+              <a:t>十一、周期性系统合规回顾（System Periodic Review，SPR）</a:t>
+            </a:r>
+          </a:p>
+          <a:p>
+            <a:pPr algn="l">
+              <a:lnSpc>
+                <a:spcPct val="120000"/>
+              </a:lnSpc>
+              <a:spcBef>
+                <a:spcPts val="640"/>
+              </a:spcBef>
+            </a:pPr>
+            <a:r>
+              <a:rPr sz="1860" b="0">
+                <a:solidFill>
+                  <a:srgbClr val="1A1A1A"/>
+                </a:solidFill>
+                <a:latin typeface="Arial"/>
+                <a:ea typeface="微软雅黑"/>
+                <a:cs typeface="Arial"/>
+              </a:rPr>
+              <a:t>欧美药企标准要求：每 12 个月开展计算机化系统周期性回顾 SPR</a:t>
+            </a:r>
+          </a:p>
+          <a:p>
+            <a:pPr algn="l">
+              <a:lnSpc>
+                <a:spcPct val="120000"/>
+              </a:lnSpc>
+              <a:spcBef>
+                <a:spcPts val="640"/>
+              </a:spcBef>
+            </a:pPr>
+            <a:r>
+              <a:rPr sz="1860" b="0">
+                <a:solidFill>
+                  <a:srgbClr val="1A1A1A"/>
+                </a:solidFill>
+                <a:latin typeface="Arial"/>
+                <a:ea typeface="微软雅黑"/>
+                <a:cs typeface="Arial"/>
+              </a:rPr>
+              <a:t>十二、文档持续维护</a:t>
             </a:r>
           </a:p>
         </p:txBody>
@@ -7998,8 +8257,8 @@
         </p:nvCxnSpPr>
         <p:spPr>
           <a:xfrm>
-            <a:off x="1207011" y="9367868"/>
-            <a:ext cx="10616210" cy="0"/>
+            <a:off x="17790631" y="2121413"/>
+            <a:ext cx="0" cy="10277881"/>
           </a:xfrm>
           <a:prstGeom prst="line">
             <a:avLst/>
@@ -8033,8 +8292,8 @@
         </p:nvSpPr>
         <p:spPr>
           <a:xfrm>
-            <a:off x="1280163" y="9477596"/>
-            <a:ext cx="10506482" cy="3506915"/>
+            <a:off x="18010087" y="2011685"/>
+            <a:ext cx="1572771" cy="841250"/>
           </a:xfrm>
           <a:prstGeom prst="rect">
             <a:avLst/>
@@ -8042,336 +8301,40 @@
           <a:noFill/>
         </p:spPr>
         <p:txBody>
-          <a:bodyPr wrap="square" lIns="0" rIns="0" tIns="0" bIns="0" anchor="t">
+          <a:bodyPr wrap="square" lIns="0" rIns="0" tIns="0" bIns="0" anchor="ctr">
             <a:spAutoFit/>
           </a:bodyPr>
           <a:lstStyle/>
           <a:p>
             <a:pPr algn="l">
               <a:lnSpc>
-                <a:spcPct val="114000"/>
+                <a:spcPct val="128000"/>
               </a:lnSpc>
             </a:pPr>
             <a:r>
-              <a:rPr sz="1760" b="0">
-                <a:solidFill>
-                  <a:srgbClr val="1A1A1A"/>
+              <a:rPr sz="5200" b="1" i="0">
+                <a:solidFill>
+                  <a:srgbClr val="132556"/>
                 </a:solidFill>
                 <a:latin typeface="Arial"/>
                 <a:ea typeface="微软雅黑"/>
                 <a:cs typeface="Arial"/>
               </a:rPr>
-              <a:t>一、用户访问与账号权限持续管理</a:t>
-            </a:r>
-          </a:p>
-          <a:p>
-            <a:pPr algn="l">
-              <a:lnSpc>
-                <a:spcPct val="114000"/>
-              </a:lnSpc>
-            </a:pPr>
-            <a:r>
-              <a:rPr sz="1760" b="0">
-                <a:solidFill>
-                  <a:srgbClr val="1A1A1A"/>
-                </a:solidFill>
-                <a:latin typeface="Arial"/>
-                <a:ea typeface="微软雅黑"/>
-                <a:cs typeface="Arial"/>
-              </a:rPr>
-              <a:t>二、审计追踪（Audit Trail）常态化管理（核查高频重点）</a:t>
-            </a:r>
-          </a:p>
-          <a:p>
-            <a:pPr algn="l">
-              <a:lnSpc>
-                <a:spcPct val="114000"/>
-              </a:lnSpc>
-            </a:pPr>
-            <a:r>
-              <a:rPr sz="1760" b="0">
-                <a:solidFill>
-                  <a:srgbClr val="1A1A1A"/>
-                </a:solidFill>
-                <a:latin typeface="Arial"/>
-                <a:ea typeface="微软雅黑"/>
-                <a:cs typeface="Arial"/>
-              </a:rPr>
-              <a:t>三、系统日常运维管理（所有运维操作不能脱离 GMP 体系）</a:t>
-            </a:r>
-          </a:p>
-          <a:p>
-            <a:pPr algn="l">
-              <a:lnSpc>
-                <a:spcPct val="114000"/>
-              </a:lnSpc>
-            </a:pPr>
-            <a:r>
-              <a:rPr sz="1760" b="0">
-                <a:solidFill>
-                  <a:srgbClr val="1A1A1A"/>
-                </a:solidFill>
-                <a:latin typeface="Arial"/>
-                <a:ea typeface="微软雅黑"/>
-                <a:cs typeface="Arial"/>
-              </a:rPr>
-              <a:t>四、备份管理与定期灾难恢复演练</a:t>
-            </a:r>
-          </a:p>
-          <a:p>
-            <a:pPr algn="l">
-              <a:lnSpc>
-                <a:spcPct val="114000"/>
-              </a:lnSpc>
-            </a:pPr>
-            <a:r>
-              <a:rPr sz="1760" b="0">
-                <a:solidFill>
-                  <a:srgbClr val="1A1A1A"/>
-                </a:solidFill>
-                <a:latin typeface="Arial"/>
-                <a:ea typeface="微软雅黑"/>
-                <a:cs typeface="Arial"/>
-              </a:rPr>
-              <a:t>五、电子记录、电子签名日常管控</a:t>
-            </a:r>
-          </a:p>
-          <a:p>
-            <a:pPr algn="l">
-              <a:lnSpc>
-                <a:spcPct val="114000"/>
-              </a:lnSpc>
-            </a:pPr>
-            <a:r>
-              <a:rPr sz="1760" b="0">
-                <a:solidFill>
-                  <a:srgbClr val="1A1A1A"/>
-                </a:solidFill>
-                <a:latin typeface="Arial"/>
-                <a:ea typeface="微软雅黑"/>
-                <a:cs typeface="Arial"/>
-              </a:rPr>
-              <a:t>六、系统异常事件、故障管理（IT 与质量体系打通）</a:t>
-            </a:r>
-          </a:p>
-          <a:p>
-            <a:pPr algn="l">
-              <a:lnSpc>
-                <a:spcPct val="114000"/>
-              </a:lnSpc>
-            </a:pPr>
-            <a:r>
-              <a:rPr sz="1760" b="0">
-                <a:solidFill>
-                  <a:srgbClr val="1A1A1A"/>
-                </a:solidFill>
-                <a:latin typeface="Arial"/>
-                <a:ea typeface="微软雅黑"/>
-                <a:cs typeface="Arial"/>
-              </a:rPr>
-              <a:t>七、变更控制—— 运行阶段所有系统变更必经流程</a:t>
-            </a:r>
-          </a:p>
-          <a:p>
-            <a:pPr algn="l">
-              <a:lnSpc>
-                <a:spcPct val="114000"/>
-              </a:lnSpc>
-            </a:pPr>
-            <a:r>
-              <a:rPr sz="1760" b="0">
-                <a:solidFill>
-                  <a:srgbClr val="1A1A1A"/>
-                </a:solidFill>
-                <a:latin typeface="Arial"/>
-                <a:ea typeface="微软雅黑"/>
-                <a:cs typeface="Arial"/>
-              </a:rPr>
-              <a:t>八、供应商持续管理（外购软件、SaaS 云系统重点）</a:t>
-            </a:r>
-          </a:p>
-          <a:p>
-            <a:pPr algn="l">
-              <a:lnSpc>
-                <a:spcPct val="114000"/>
-              </a:lnSpc>
-            </a:pPr>
-            <a:r>
-              <a:rPr sz="1760" b="0">
-                <a:solidFill>
-                  <a:srgbClr val="1A1A1A"/>
-                </a:solidFill>
-                <a:latin typeface="Arial"/>
-                <a:ea typeface="微软雅黑"/>
-                <a:cs typeface="Arial"/>
-              </a:rPr>
-              <a:t>十、人员持续培训与行为监督</a:t>
-            </a:r>
-          </a:p>
-          <a:p>
-            <a:pPr algn="l">
-              <a:lnSpc>
-                <a:spcPct val="114000"/>
-              </a:lnSpc>
-            </a:pPr>
-            <a:r>
-              <a:rPr sz="1760" b="0">
-                <a:solidFill>
-                  <a:srgbClr val="1A1A1A"/>
-                </a:solidFill>
-                <a:latin typeface="Arial"/>
-                <a:ea typeface="微软雅黑"/>
-                <a:cs typeface="Arial"/>
-              </a:rPr>
-              <a:t>十一、周期性系统合规回顾（System Periodic Review，SPR）</a:t>
-            </a:r>
-          </a:p>
-          <a:p>
-            <a:pPr algn="l">
-              <a:lnSpc>
-                <a:spcPct val="114000"/>
-              </a:lnSpc>
-            </a:pPr>
-            <a:r>
-              <a:rPr sz="1760" b="0">
-                <a:solidFill>
-                  <a:srgbClr val="1A1A1A"/>
-                </a:solidFill>
-                <a:latin typeface="Arial"/>
-                <a:ea typeface="微软雅黑"/>
-                <a:cs typeface="Arial"/>
-              </a:rPr>
-              <a:t>欧美药企标准要求：每 12 个月开展计算机化系统周期性回顾 SPR</a:t>
-            </a:r>
-          </a:p>
-          <a:p>
-            <a:pPr algn="l">
-              <a:lnSpc>
-                <a:spcPct val="114000"/>
-              </a:lnSpc>
-            </a:pPr>
-            <a:r>
-              <a:rPr sz="1760" b="0">
-                <a:solidFill>
-                  <a:srgbClr val="1A1A1A"/>
-                </a:solidFill>
-                <a:latin typeface="Arial"/>
-                <a:ea typeface="微软雅黑"/>
-                <a:cs typeface="Arial"/>
-              </a:rPr>
-              <a:t>十二、文档持续维护</a:t>
-            </a:r>
-          </a:p>
-        </p:txBody>
-      </p:sp>
-      <p:sp>
-        <p:nvSpPr>
-          <p:cNvPr id="21" name="Rounded Rectangle 20"/>
-          <p:cNvSpPr/>
+              <a:t>04</a:t>
+            </a:r>
+          </a:p>
+        </p:txBody>
+      </p:sp>
+      <p:sp>
+        <p:nvSpPr>
+          <p:cNvPr id="21" name="TextBox 20"/>
+          <p:cNvSpPr txBox="1"/>
           <p:nvPr/>
         </p:nvSpPr>
         <p:spPr>
           <a:xfrm>
-            <a:off x="12298710" y="8490042"/>
-            <a:ext cx="11164851" cy="4640774"/>
-          </a:xfrm>
-          <a:prstGeom prst="roundRect">
-            <a:avLst>
-              <a:gd name="adj" fmla="val 4000"/>
-            </a:avLst>
-          </a:prstGeom>
-          <a:solidFill>
-            <a:srgbClr val="F7F9FD"/>
-          </a:solidFill>
-          <a:ln w="25400">
-            <a:solidFill>
-              <a:srgbClr val="C5D0E6"/>
-            </a:solidFill>
-          </a:ln>
-          <a:effectLst>
-            <a:outerShdw blurRad="76200" dist="38100" dir="5400000" rotWithShape="0">
-              <a:srgbClr val="000000">
-                <a:alpha val="18000"/>
-              </a:srgbClr>
-            </a:outerShdw>
-          </a:effectLst>
-        </p:spPr>
-        <p:style>
-          <a:lnRef idx="1">
-            <a:schemeClr val="accent1"/>
-          </a:lnRef>
-          <a:fillRef idx="3">
-            <a:schemeClr val="accent1"/>
-          </a:fillRef>
-          <a:effectRef idx="2">
-            <a:schemeClr val="accent1"/>
-          </a:effectRef>
-          <a:fontRef idx="minor">
-            <a:schemeClr val="lt1"/>
-          </a:fontRef>
-        </p:style>
-        <p:txBody>
-          <a:bodyPr rtlCol="0" anchor="ctr" wrap="square"/>
-          <a:lstStyle/>
-          <a:p>
-            <a:pPr algn="ctr"/>
-          </a:p>
-        </p:txBody>
-      </p:sp>
-      <p:sp>
-        <p:nvSpPr>
-          <p:cNvPr id="22" name="Rectangle 21"/>
-          <p:cNvSpPr/>
-          <p:nvPr/>
-        </p:nvSpPr>
-        <p:spPr>
-          <a:xfrm>
-            <a:off x="12298710" y="8490042"/>
-            <a:ext cx="109728" cy="4640774"/>
-          </a:xfrm>
-          <a:prstGeom prst="rect">
-            <a:avLst/>
-          </a:prstGeom>
-          <a:solidFill>
-            <a:srgbClr val="1D42E1"/>
-          </a:solidFill>
-          <a:ln>
-            <a:noFill/>
-          </a:ln>
-          <a:effectLst/>
-        </p:spPr>
-        <p:style>
-          <a:lnRef idx="1">
-            <a:schemeClr val="accent1"/>
-          </a:lnRef>
-          <a:fillRef idx="3">
-            <a:schemeClr val="accent1"/>
-          </a:fillRef>
-          <a:effectRef idx="2">
-            <a:schemeClr val="accent1"/>
-          </a:effectRef>
-          <a:fontRef idx="minor">
-            <a:schemeClr val="lt1"/>
-          </a:fontRef>
-        </p:style>
-        <p:txBody>
-          <a:bodyPr rtlCol="0" anchor="ctr" wrap="square"/>
-          <a:lstStyle/>
-          <a:p>
-            <a:pPr algn="ctr"/>
-          </a:p>
-        </p:txBody>
-      </p:sp>
-      <p:sp>
-        <p:nvSpPr>
-          <p:cNvPr id="23" name="TextBox 22"/>
-          <p:cNvSpPr txBox="1"/>
-          <p:nvPr/>
-        </p:nvSpPr>
-        <p:spPr>
-          <a:xfrm>
-            <a:off x="12591319" y="8526618"/>
-            <a:ext cx="1499619" cy="804674"/>
+            <a:off x="19765740" y="2011685"/>
+            <a:ext cx="3240621" cy="841250"/>
           </a:xfrm>
           <a:prstGeom prst="rect">
             <a:avLst/>
@@ -8386,11 +8349,11 @@
           <a:p>
             <a:pPr algn="l">
               <a:lnSpc>
-                <a:spcPct val="128000"/>
+                <a:spcPct val="108000"/>
               </a:lnSpc>
             </a:pPr>
             <a:r>
-              <a:rPr sz="4800" b="1" i="0">
+              <a:rPr sz="1900" b="1" i="0">
                 <a:solidFill>
                   <a:srgbClr val="132556"/>
                 </a:solidFill>
@@ -8398,47 +8361,6 @@
                 <a:ea typeface="微软雅黑"/>
                 <a:cs typeface="Arial"/>
               </a:rPr>
-              <a:t>04</a:t>
-            </a:r>
-          </a:p>
-        </p:txBody>
-      </p:sp>
-      <p:sp>
-        <p:nvSpPr>
-          <p:cNvPr id="24" name="TextBox 23"/>
-          <p:cNvSpPr txBox="1"/>
-          <p:nvPr/>
-        </p:nvSpPr>
-        <p:spPr>
-          <a:xfrm>
-            <a:off x="14036075" y="8599770"/>
-            <a:ext cx="9061726" cy="658369"/>
-          </a:xfrm>
-          <a:prstGeom prst="rect">
-            <a:avLst/>
-          </a:prstGeom>
-          <a:noFill/>
-        </p:spPr>
-        <p:txBody>
-          <a:bodyPr wrap="square" lIns="0" rIns="0" tIns="0" bIns="0" anchor="ctr">
-            <a:spAutoFit/>
-          </a:bodyPr>
-          <a:lstStyle/>
-          <a:p>
-            <a:pPr algn="l">
-              <a:lnSpc>
-                <a:spcPct val="108000"/>
-              </a:lnSpc>
-            </a:pPr>
-            <a:r>
-              <a:rPr sz="2400" b="1" i="0">
-                <a:solidFill>
-                  <a:srgbClr val="132556"/>
-                </a:solidFill>
-                <a:latin typeface="Arial"/>
-                <a:ea typeface="微软雅黑"/>
-                <a:cs typeface="Arial"/>
-              </a:rPr>
               <a:t>库房管理常见合规性问题</a:t>
             </a:r>
           </a:p>
@@ -8446,19 +8368,19 @@
       </p:sp>
       <p:cxnSp>
         <p:nvCxnSpPr>
-          <p:cNvPr id="25" name="Connector 24"/>
+          <p:cNvPr id="22" name="Connector 21"/>
           <p:cNvCxnSpPr/>
           <p:nvPr/>
         </p:nvCxnSpPr>
         <p:spPr>
           <a:xfrm>
-            <a:off x="12591319" y="9367868"/>
-            <a:ext cx="10616211" cy="0"/>
+            <a:off x="18010087" y="2926087"/>
+            <a:ext cx="4996274" cy="0"/>
           </a:xfrm>
           <a:prstGeom prst="line">
             <a:avLst/>
           </a:prstGeom>
-          <a:ln w="25400">
+          <a:ln w="31750">
             <a:solidFill>
               <a:srgbClr val="C5D0E6"/>
             </a:solidFill>
@@ -8481,14 +8403,14 @@
       </p:cxnSp>
       <p:sp>
         <p:nvSpPr>
-          <p:cNvPr id="26" name="TextBox 25"/>
+          <p:cNvPr id="23" name="TextBox 22"/>
           <p:cNvSpPr txBox="1"/>
           <p:nvPr/>
         </p:nvSpPr>
         <p:spPr>
           <a:xfrm>
-            <a:off x="12664471" y="9477596"/>
-            <a:ext cx="10506482" cy="3506915"/>
+            <a:off x="18119816" y="3145543"/>
+            <a:ext cx="4886545" cy="9144022"/>
           </a:xfrm>
           <a:prstGeom prst="rect">
             <a:avLst/>
@@ -8503,11 +8425,11 @@
           <a:p>
             <a:pPr algn="l">
               <a:lnSpc>
-                <a:spcPct val="112000"/>
+                <a:spcPct val="120000"/>
               </a:lnSpc>
             </a:pPr>
             <a:r>
-              <a:rPr sz="1440" b="0">
+              <a:rPr sz="1860" b="0">
                 <a:solidFill>
                   <a:srgbClr val="1A1A1A"/>
                 </a:solidFill>
@@ -8521,11 +8443,14 @@
           <a:p>
             <a:pPr algn="l">
               <a:lnSpc>
-                <a:spcPct val="112000"/>
+                <a:spcPct val="120000"/>
               </a:lnSpc>
+              <a:spcBef>
+                <a:spcPts val="578"/>
+              </a:spcBef>
             </a:pPr>
             <a:r>
-              <a:rPr sz="1440" b="0">
+              <a:rPr sz="1860" b="0">
                 <a:solidFill>
                   <a:srgbClr val="1A1A1A"/>
                 </a:solidFill>
@@ -8539,11 +8464,14 @@
           <a:p>
             <a:pPr algn="l">
               <a:lnSpc>
-                <a:spcPct val="112000"/>
+                <a:spcPct val="120000"/>
               </a:lnSpc>
+              <a:spcBef>
+                <a:spcPts val="578"/>
+              </a:spcBef>
             </a:pPr>
             <a:r>
-              <a:rPr sz="1440" b="0">
+              <a:rPr sz="1860" b="0">
                 <a:solidFill>
                   <a:srgbClr val="1A1A1A"/>
                 </a:solidFill>
@@ -8557,11 +8485,14 @@
           <a:p>
             <a:pPr algn="l">
               <a:lnSpc>
-                <a:spcPct val="112000"/>
+                <a:spcPct val="120000"/>
               </a:lnSpc>
+              <a:spcBef>
+                <a:spcPts val="578"/>
+              </a:spcBef>
             </a:pPr>
             <a:r>
-              <a:rPr sz="1440" b="0">
+              <a:rPr sz="1860" b="0">
                 <a:solidFill>
                   <a:srgbClr val="1A1A1A"/>
                 </a:solidFill>
@@ -8575,11 +8506,14 @@
           <a:p>
             <a:pPr algn="l">
               <a:lnSpc>
-                <a:spcPct val="112000"/>
+                <a:spcPct val="120000"/>
               </a:lnSpc>
+              <a:spcBef>
+                <a:spcPts val="578"/>
+              </a:spcBef>
             </a:pPr>
             <a:r>
-              <a:rPr sz="1440" b="0">
+              <a:rPr sz="1860" b="0">
                 <a:solidFill>
                   <a:srgbClr val="1A1A1A"/>
                 </a:solidFill>
@@ -8593,11 +8527,14 @@
           <a:p>
             <a:pPr algn="l">
               <a:lnSpc>
-                <a:spcPct val="112000"/>
+                <a:spcPct val="120000"/>
               </a:lnSpc>
+              <a:spcBef>
+                <a:spcPts val="578"/>
+              </a:spcBef>
             </a:pPr>
             <a:r>
-              <a:rPr sz="1440" b="0">
+              <a:rPr sz="1860" b="0">
                 <a:solidFill>
                   <a:srgbClr val="1A1A1A"/>
                 </a:solidFill>
@@ -8611,11 +8548,14 @@
           <a:p>
             <a:pPr algn="l">
               <a:lnSpc>
-                <a:spcPct val="112000"/>
+                <a:spcPct val="120000"/>
               </a:lnSpc>
+              <a:spcBef>
+                <a:spcPts val="578"/>
+              </a:spcBef>
             </a:pPr>
             <a:r>
-              <a:rPr sz="1440" b="0">
+              <a:rPr sz="1860" b="0">
                 <a:solidFill>
                   <a:srgbClr val="1A1A1A"/>
                 </a:solidFill>
@@ -8629,11 +8569,14 @@
           <a:p>
             <a:pPr algn="l">
               <a:lnSpc>
-                <a:spcPct val="112000"/>
+                <a:spcPct val="120000"/>
               </a:lnSpc>
+              <a:spcBef>
+                <a:spcPts val="578"/>
+              </a:spcBef>
             </a:pPr>
             <a:r>
-              <a:rPr sz="1440" b="0">
+              <a:rPr sz="1860" b="0">
                 <a:solidFill>
                   <a:srgbClr val="1A1A1A"/>
                 </a:solidFill>
@@ -8647,11 +8590,14 @@
           <a:p>
             <a:pPr algn="l">
               <a:lnSpc>
-                <a:spcPct val="112000"/>
+                <a:spcPct val="120000"/>
               </a:lnSpc>
+              <a:spcBef>
+                <a:spcPts val="578"/>
+              </a:spcBef>
             </a:pPr>
             <a:r>
-              <a:rPr sz="1440" b="0">
+              <a:rPr sz="1860" b="0">
                 <a:solidFill>
                   <a:srgbClr val="1A1A1A"/>
                 </a:solidFill>
@@ -8665,11 +8611,14 @@
           <a:p>
             <a:pPr algn="l">
               <a:lnSpc>
-                <a:spcPct val="112000"/>
+                <a:spcPct val="120000"/>
               </a:lnSpc>
+              <a:spcBef>
+                <a:spcPts val="578"/>
+              </a:spcBef>
             </a:pPr>
             <a:r>
-              <a:rPr sz="1440" b="0">
+              <a:rPr sz="1860" b="0">
                 <a:solidFill>
                   <a:srgbClr val="1A1A1A"/>
                 </a:solidFill>
@@ -8683,16 +8632,16 @@
           <a:p>
             <a:pPr algn="l">
               <a:lnSpc>
-                <a:spcPct val="112000"/>
+                <a:spcPct val="120000"/>
               </a:lnSpc>
               <a:spcBef>
-                <a:spcPts val="400"/>
+                <a:spcPts val="2178"/>
               </a:spcBef>
             </a:pPr>
             <a:r>
-              <a:rPr sz="1440" b="1">
-                <a:solidFill>
-                  <a:srgbClr val="FF0000"/>
+              <a:rPr sz="1860" b="1">
+                <a:solidFill>
+                  <a:srgbClr val="D40000"/>
                 </a:solidFill>
                 <a:latin typeface="Arial"/>
                 <a:ea typeface="微软雅黑"/>
@@ -8704,13 +8653,16 @@
           <a:p>
             <a:pPr algn="l" marL="292608" indent="-292608">
               <a:lnSpc>
-                <a:spcPct val="112000"/>
+                <a:spcPct val="120000"/>
               </a:lnSpc>
+              <a:spcBef>
+                <a:spcPts val="578"/>
+              </a:spcBef>
               <a:buFont typeface="Arial"/>
               <a:buChar char="●"/>
             </a:pPr>
             <a:r>
-              <a:rPr sz="1440" b="0">
+              <a:rPr sz="1860" b="0">
                 <a:solidFill>
                   <a:srgbClr val="1A1A1A"/>
                 </a:solidFill>
@@ -8724,13 +8676,16 @@
           <a:p>
             <a:pPr algn="l" marL="292608" indent="-292608">
               <a:lnSpc>
-                <a:spcPct val="112000"/>
+                <a:spcPct val="120000"/>
               </a:lnSpc>
+              <a:spcBef>
+                <a:spcPts val="578"/>
+              </a:spcBef>
               <a:buFont typeface="Arial"/>
               <a:buChar char="●"/>
             </a:pPr>
             <a:r>
-              <a:rPr sz="1440" b="0">
+              <a:rPr sz="1860" b="0">
                 <a:solidFill>
                   <a:srgbClr val="1A1A1A"/>
                 </a:solidFill>
@@ -8744,13 +8699,16 @@
           <a:p>
             <a:pPr algn="l" marL="292608" indent="-292608">
               <a:lnSpc>
-                <a:spcPct val="112000"/>
+                <a:spcPct val="120000"/>
               </a:lnSpc>
+              <a:spcBef>
+                <a:spcPts val="578"/>
+              </a:spcBef>
               <a:buFont typeface="Arial"/>
               <a:buChar char="●"/>
             </a:pPr>
             <a:r>
-              <a:rPr sz="1440" b="0">
+              <a:rPr sz="1860" b="0">
                 <a:solidFill>
                   <a:srgbClr val="1A1A1A"/>
                 </a:solidFill>
@@ -8764,13 +8722,16 @@
           <a:p>
             <a:pPr algn="l" marL="292608" indent="-292608">
               <a:lnSpc>
-                <a:spcPct val="112000"/>
+                <a:spcPct val="120000"/>
               </a:lnSpc>
+              <a:spcBef>
+                <a:spcPts val="578"/>
+              </a:spcBef>
               <a:buFont typeface="Arial"/>
               <a:buChar char="●"/>
             </a:pPr>
             <a:r>
-              <a:rPr sz="1440" b="0">
+              <a:rPr sz="1860" b="0">
                 <a:solidFill>
                   <a:srgbClr val="1A1A1A"/>
                 </a:solidFill>
@@ -8784,13 +8745,16 @@
           <a:p>
             <a:pPr algn="l" marL="292608" indent="-292608">
               <a:lnSpc>
-                <a:spcPct val="112000"/>
+                <a:spcPct val="120000"/>
               </a:lnSpc>
+              <a:spcBef>
+                <a:spcPts val="578"/>
+              </a:spcBef>
               <a:buFont typeface="Arial"/>
               <a:buChar char="●"/>
             </a:pPr>
             <a:r>
-              <a:rPr sz="1440" b="0">
+              <a:rPr sz="1860" b="0">
                 <a:solidFill>
                   <a:srgbClr val="1A1A1A"/>
                 </a:solidFill>
@@ -8804,13 +8768,16 @@
           <a:p>
             <a:pPr algn="l" marL="292608" indent="-292608">
               <a:lnSpc>
-                <a:spcPct val="112000"/>
+                <a:spcPct val="120000"/>
               </a:lnSpc>
+              <a:spcBef>
+                <a:spcPts val="578"/>
+              </a:spcBef>
               <a:buFont typeface="Arial"/>
               <a:buChar char="●"/>
             </a:pPr>
             <a:r>
-              <a:rPr sz="1440" b="0">
+              <a:rPr sz="1860" b="0">
                 <a:solidFill>
                   <a:srgbClr val="1A1A1A"/>
                 </a:solidFill>
